--- a/Criptografia simetrica/sse_cifrado_simetrico_variante.pptx
+++ b/Criptografia simetrica/sse_cifrado_simetrico_variante.pptx
@@ -2,7 +2,7 @@
 <file path=ppt/presentation.xml><?xml version="1.0" encoding="utf-8"?>
 <p:presentation xmlns:a="http://schemas.openxmlformats.org/drawingml/2006/main" xmlns:r="http://schemas.openxmlformats.org/officeDocument/2006/relationships" xmlns:p="http://schemas.openxmlformats.org/presentationml/2006/main" saveSubsetFonts="1" autoCompressPictures="0">
   <p:sldMasterIdLst>
-    <p:sldMasterId id="2147483648" r:id="rId1"/>
+    <p:sldMasterId id="2147483676" r:id="rId1"/>
   </p:sldMasterIdLst>
   <p:notesMasterIdLst>
     <p:notesMasterId r:id="rId13"/>
@@ -23,7 +23,10 @@
   <p:sldSz cx="12192000" cy="6858000"/>
   <p:notesSz cx="6858000" cy="12192000"/>
   <p:defaultTextStyle>
-    <a:lvl1pPr marL="0" algn="l" defTabSz="914400" rtl="0" eaLnBrk="1" latinLnBrk="0" hangingPunct="1">
+    <a:defPPr>
+      <a:defRPr lang="en-US"/>
+    </a:defPPr>
+    <a:lvl1pPr marL="0" algn="l" defTabSz="457200" rtl="0" eaLnBrk="1" latinLnBrk="0" hangingPunct="1">
       <a:defRPr sz="1800" kern="1200">
         <a:solidFill>
           <a:schemeClr val="tx1"/>
@@ -33,7 +36,7 @@
         <a:cs typeface="+mn-cs"/>
       </a:defRPr>
     </a:lvl1pPr>
-    <a:lvl2pPr marL="457200" algn="l" defTabSz="914400" rtl="0" eaLnBrk="1" latinLnBrk="0" hangingPunct="1">
+    <a:lvl2pPr marL="457200" algn="l" defTabSz="457200" rtl="0" eaLnBrk="1" latinLnBrk="0" hangingPunct="1">
       <a:defRPr sz="1800" kern="1200">
         <a:solidFill>
           <a:schemeClr val="tx1"/>
@@ -43,7 +46,7 @@
         <a:cs typeface="+mn-cs"/>
       </a:defRPr>
     </a:lvl2pPr>
-    <a:lvl3pPr marL="914400" algn="l" defTabSz="914400" rtl="0" eaLnBrk="1" latinLnBrk="0" hangingPunct="1">
+    <a:lvl3pPr marL="914400" algn="l" defTabSz="457200" rtl="0" eaLnBrk="1" latinLnBrk="0" hangingPunct="1">
       <a:defRPr sz="1800" kern="1200">
         <a:solidFill>
           <a:schemeClr val="tx1"/>
@@ -53,7 +56,7 @@
         <a:cs typeface="+mn-cs"/>
       </a:defRPr>
     </a:lvl3pPr>
-    <a:lvl4pPr marL="1371600" algn="l" defTabSz="914400" rtl="0" eaLnBrk="1" latinLnBrk="0" hangingPunct="1">
+    <a:lvl4pPr marL="1371600" algn="l" defTabSz="457200" rtl="0" eaLnBrk="1" latinLnBrk="0" hangingPunct="1">
       <a:defRPr sz="1800" kern="1200">
         <a:solidFill>
           <a:schemeClr val="tx1"/>
@@ -63,7 +66,7 @@
         <a:cs typeface="+mn-cs"/>
       </a:defRPr>
     </a:lvl4pPr>
-    <a:lvl5pPr marL="1828800" algn="l" defTabSz="914400" rtl="0" eaLnBrk="1" latinLnBrk="0" hangingPunct="1">
+    <a:lvl5pPr marL="1828800" algn="l" defTabSz="457200" rtl="0" eaLnBrk="1" latinLnBrk="0" hangingPunct="1">
       <a:defRPr sz="1800" kern="1200">
         <a:solidFill>
           <a:schemeClr val="tx1"/>
@@ -73,7 +76,7 @@
         <a:cs typeface="+mn-cs"/>
       </a:defRPr>
     </a:lvl5pPr>
-    <a:lvl6pPr marL="2286000" algn="l" defTabSz="914400" rtl="0" eaLnBrk="1" latinLnBrk="0" hangingPunct="1">
+    <a:lvl6pPr marL="2286000" algn="l" defTabSz="457200" rtl="0" eaLnBrk="1" latinLnBrk="0" hangingPunct="1">
       <a:defRPr sz="1800" kern="1200">
         <a:solidFill>
           <a:schemeClr val="tx1"/>
@@ -83,7 +86,7 @@
         <a:cs typeface="+mn-cs"/>
       </a:defRPr>
     </a:lvl6pPr>
-    <a:lvl7pPr marL="2743200" algn="l" defTabSz="914400" rtl="0" eaLnBrk="1" latinLnBrk="0" hangingPunct="1">
+    <a:lvl7pPr marL="2743200" algn="l" defTabSz="457200" rtl="0" eaLnBrk="1" latinLnBrk="0" hangingPunct="1">
       <a:defRPr sz="1800" kern="1200">
         <a:solidFill>
           <a:schemeClr val="tx1"/>
@@ -93,7 +96,7 @@
         <a:cs typeface="+mn-cs"/>
       </a:defRPr>
     </a:lvl7pPr>
-    <a:lvl8pPr marL="3200400" algn="l" defTabSz="914400" rtl="0" eaLnBrk="1" latinLnBrk="0" hangingPunct="1">
+    <a:lvl8pPr marL="3200400" algn="l" defTabSz="457200" rtl="0" eaLnBrk="1" latinLnBrk="0" hangingPunct="1">
       <a:defRPr sz="1800" kern="1200">
         <a:solidFill>
           <a:schemeClr val="tx1"/>
@@ -103,7 +106,7 @@
         <a:cs typeface="+mn-cs"/>
       </a:defRPr>
     </a:lvl8pPr>
-    <a:lvl9pPr marL="3657600" algn="l" defTabSz="914400" rtl="0" eaLnBrk="1" latinLnBrk="0" hangingPunct="1">
+    <a:lvl9pPr marL="3657600" algn="l" defTabSz="457200" rtl="0" eaLnBrk="1" latinLnBrk="0" hangingPunct="1">
       <a:defRPr sz="1800" kern="1200">
         <a:solidFill>
           <a:schemeClr val="tx1"/>
@@ -31392,7 +31395,552 @@
 </file>
 
 <file path=ppt/slideLayouts/slideLayout1.xml><?xml version="1.0" encoding="utf-8"?>
-<p:sldLayout xmlns:a="http://schemas.openxmlformats.org/drawingml/2006/main" xmlns:r="http://schemas.openxmlformats.org/officeDocument/2006/relationships" xmlns:p="http://schemas.openxmlformats.org/presentationml/2006/main" preserve="1">
+<p:sldLayout xmlns:a="http://schemas.openxmlformats.org/drawingml/2006/main" xmlns:r="http://schemas.openxmlformats.org/officeDocument/2006/relationships" xmlns:p="http://schemas.openxmlformats.org/presentationml/2006/main" type="title" preserve="1">
+  <p:cSld name="Title Slide">
+    <p:spTree>
+      <p:nvGrpSpPr>
+        <p:cNvPr id="1" name=""/>
+        <p:cNvGrpSpPr/>
+        <p:nvPr/>
+      </p:nvGrpSpPr>
+      <p:grpSpPr>
+        <a:xfrm>
+          <a:off x="0" y="0"/>
+          <a:ext cx="0" cy="0"/>
+          <a:chOff x="0" y="0"/>
+          <a:chExt cx="0" cy="0"/>
+        </a:xfrm>
+      </p:grpSpPr>
+      <p:sp>
+        <p:nvSpPr>
+          <p:cNvPr id="2" name="Title 1"/>
+          <p:cNvSpPr>
+            <a:spLocks noGrp="1"/>
+          </p:cNvSpPr>
+          <p:nvPr>
+            <p:ph type="ctrTitle"/>
+          </p:nvPr>
+        </p:nvSpPr>
+        <p:spPr>
+          <a:xfrm>
+            <a:off x="1524000" y="1122363"/>
+            <a:ext cx="9144000" cy="2387600"/>
+          </a:xfrm>
+        </p:spPr>
+        <p:txBody>
+          <a:bodyPr anchor="b"/>
+          <a:lstStyle>
+            <a:lvl1pPr algn="ctr">
+              <a:defRPr sz="6000"/>
+            </a:lvl1pPr>
+          </a:lstStyle>
+          <a:p>
+            <a:r>
+              <a:rPr lang="en-US"/>
+              <a:t>Click to edit Master title style</a:t>
+            </a:r>
+            <a:endParaRPr lang="en-US" dirty="0"/>
+          </a:p>
+        </p:txBody>
+      </p:sp>
+      <p:sp>
+        <p:nvSpPr>
+          <p:cNvPr id="3" name="Subtitle 2"/>
+          <p:cNvSpPr>
+            <a:spLocks noGrp="1"/>
+          </p:cNvSpPr>
+          <p:nvPr>
+            <p:ph type="subTitle" idx="1"/>
+          </p:nvPr>
+        </p:nvSpPr>
+        <p:spPr>
+          <a:xfrm>
+            <a:off x="1524000" y="3602038"/>
+            <a:ext cx="9144000" cy="1655762"/>
+          </a:xfrm>
+        </p:spPr>
+        <p:txBody>
+          <a:bodyPr/>
+          <a:lstStyle>
+            <a:lvl1pPr marL="0" indent="0" algn="ctr">
+              <a:buNone/>
+              <a:defRPr sz="2400"/>
+            </a:lvl1pPr>
+            <a:lvl2pPr marL="457200" indent="0" algn="ctr">
+              <a:buNone/>
+              <a:defRPr sz="2000"/>
+            </a:lvl2pPr>
+            <a:lvl3pPr marL="914400" indent="0" algn="ctr">
+              <a:buNone/>
+              <a:defRPr sz="1800"/>
+            </a:lvl3pPr>
+            <a:lvl4pPr marL="1371600" indent="0" algn="ctr">
+              <a:buNone/>
+              <a:defRPr sz="1600"/>
+            </a:lvl4pPr>
+            <a:lvl5pPr marL="1828800" indent="0" algn="ctr">
+              <a:buNone/>
+              <a:defRPr sz="1600"/>
+            </a:lvl5pPr>
+            <a:lvl6pPr marL="2286000" indent="0" algn="ctr">
+              <a:buNone/>
+              <a:defRPr sz="1600"/>
+            </a:lvl6pPr>
+            <a:lvl7pPr marL="2743200" indent="0" algn="ctr">
+              <a:buNone/>
+              <a:defRPr sz="1600"/>
+            </a:lvl7pPr>
+            <a:lvl8pPr marL="3200400" indent="0" algn="ctr">
+              <a:buNone/>
+              <a:defRPr sz="1600"/>
+            </a:lvl8pPr>
+            <a:lvl9pPr marL="3657600" indent="0" algn="ctr">
+              <a:buNone/>
+              <a:defRPr sz="1600"/>
+            </a:lvl9pPr>
+          </a:lstStyle>
+          <a:p>
+            <a:r>
+              <a:rPr lang="en-US"/>
+              <a:t>Click to edit Master subtitle style</a:t>
+            </a:r>
+            <a:endParaRPr lang="en-US" dirty="0"/>
+          </a:p>
+        </p:txBody>
+      </p:sp>
+      <p:sp>
+        <p:nvSpPr>
+          <p:cNvPr id="4" name="Date Placeholder 3"/>
+          <p:cNvSpPr>
+            <a:spLocks noGrp="1"/>
+          </p:cNvSpPr>
+          <p:nvPr>
+            <p:ph type="dt" sz="half" idx="10"/>
+          </p:nvPr>
+        </p:nvSpPr>
+        <p:spPr/>
+        <p:txBody>
+          <a:bodyPr/>
+          <a:lstStyle/>
+          <a:p>
+            <a:fld id="{DAB5A13C-17B4-48A4-AF5F-EEE8ED69FC02}" type="datetimeFigureOut">
+              <a:rPr lang="en-US" smtClean="0"/>
+              <a:t>7/14/2026</a:t>
+            </a:fld>
+            <a:endParaRPr lang="en-US"/>
+          </a:p>
+        </p:txBody>
+      </p:sp>
+      <p:sp>
+        <p:nvSpPr>
+          <p:cNvPr id="5" name="Footer Placeholder 4"/>
+          <p:cNvSpPr>
+            <a:spLocks noGrp="1"/>
+          </p:cNvSpPr>
+          <p:nvPr>
+            <p:ph type="ftr" sz="quarter" idx="11"/>
+          </p:nvPr>
+        </p:nvSpPr>
+        <p:spPr/>
+        <p:txBody>
+          <a:bodyPr/>
+          <a:lstStyle/>
+          <a:p>
+            <a:endParaRPr lang="en-US"/>
+          </a:p>
+        </p:txBody>
+      </p:sp>
+      <p:sp>
+        <p:nvSpPr>
+          <p:cNvPr id="6" name="Slide Number Placeholder 5"/>
+          <p:cNvSpPr>
+            <a:spLocks noGrp="1"/>
+          </p:cNvSpPr>
+          <p:nvPr>
+            <p:ph type="sldNum" sz="quarter" idx="12"/>
+          </p:nvPr>
+        </p:nvSpPr>
+        <p:spPr/>
+        <p:txBody>
+          <a:bodyPr/>
+          <a:lstStyle/>
+          <a:p>
+            <a:fld id="{9DDC1F40-31FB-4487-81C0-94B40DAEFA1D}" type="slidenum">
+              <a:rPr lang="en-US" smtClean="0"/>
+              <a:t>‹#›</a:t>
+            </a:fld>
+            <a:endParaRPr lang="en-US"/>
+          </a:p>
+        </p:txBody>
+      </p:sp>
+    </p:spTree>
+    <p:extLst>
+      <p:ext uri="{BB962C8B-B14F-4D97-AF65-F5344CB8AC3E}">
+        <p14:creationId xmlns:p14="http://schemas.microsoft.com/office/powerpoint/2010/main" val="1464720452"/>
+      </p:ext>
+    </p:extLst>
+  </p:cSld>
+  <p:clrMapOvr>
+    <a:masterClrMapping/>
+  </p:clrMapOvr>
+  <p:hf sldNum="0" hdr="0" ftr="0" dt="0"/>
+</p:sldLayout>
+</file>
+
+<file path=ppt/slideLayouts/slideLayout10.xml><?xml version="1.0" encoding="utf-8"?>
+<p:sldLayout xmlns:a="http://schemas.openxmlformats.org/drawingml/2006/main" xmlns:r="http://schemas.openxmlformats.org/officeDocument/2006/relationships" xmlns:p="http://schemas.openxmlformats.org/presentationml/2006/main" type="vertTx" preserve="1">
+  <p:cSld name="Title and Vertical Text">
+    <p:spTree>
+      <p:nvGrpSpPr>
+        <p:cNvPr id="1" name=""/>
+        <p:cNvGrpSpPr/>
+        <p:nvPr/>
+      </p:nvGrpSpPr>
+      <p:grpSpPr>
+        <a:xfrm>
+          <a:off x="0" y="0"/>
+          <a:ext cx="0" cy="0"/>
+          <a:chOff x="0" y="0"/>
+          <a:chExt cx="0" cy="0"/>
+        </a:xfrm>
+      </p:grpSpPr>
+      <p:sp>
+        <p:nvSpPr>
+          <p:cNvPr id="2" name="Title 1"/>
+          <p:cNvSpPr>
+            <a:spLocks noGrp="1"/>
+          </p:cNvSpPr>
+          <p:nvPr>
+            <p:ph type="title"/>
+          </p:nvPr>
+        </p:nvSpPr>
+        <p:spPr/>
+        <p:txBody>
+          <a:bodyPr/>
+          <a:lstStyle/>
+          <a:p>
+            <a:r>
+              <a:rPr lang="en-US"/>
+              <a:t>Click to edit Master title style</a:t>
+            </a:r>
+            <a:endParaRPr lang="en-US" dirty="0"/>
+          </a:p>
+        </p:txBody>
+      </p:sp>
+      <p:sp>
+        <p:nvSpPr>
+          <p:cNvPr id="3" name="Vertical Text Placeholder 2"/>
+          <p:cNvSpPr>
+            <a:spLocks noGrp="1"/>
+          </p:cNvSpPr>
+          <p:nvPr>
+            <p:ph type="body" orient="vert" idx="1"/>
+          </p:nvPr>
+        </p:nvSpPr>
+        <p:spPr/>
+        <p:txBody>
+          <a:bodyPr vert="eaVert"/>
+          <a:lstStyle/>
+          <a:p>
+            <a:pPr lvl="0"/>
+            <a:r>
+              <a:rPr lang="en-US"/>
+              <a:t>Click to edit Master text styles</a:t>
+            </a:r>
+          </a:p>
+          <a:p>
+            <a:pPr lvl="1"/>
+            <a:r>
+              <a:rPr lang="en-US"/>
+              <a:t>Second level</a:t>
+            </a:r>
+          </a:p>
+          <a:p>
+            <a:pPr lvl="2"/>
+            <a:r>
+              <a:rPr lang="en-US"/>
+              <a:t>Third level</a:t>
+            </a:r>
+          </a:p>
+          <a:p>
+            <a:pPr lvl="3"/>
+            <a:r>
+              <a:rPr lang="en-US"/>
+              <a:t>Fourth level</a:t>
+            </a:r>
+          </a:p>
+          <a:p>
+            <a:pPr lvl="4"/>
+            <a:r>
+              <a:rPr lang="en-US"/>
+              <a:t>Fifth level</a:t>
+            </a:r>
+            <a:endParaRPr lang="en-US" dirty="0"/>
+          </a:p>
+        </p:txBody>
+      </p:sp>
+      <p:sp>
+        <p:nvSpPr>
+          <p:cNvPr id="4" name="Date Placeholder 3"/>
+          <p:cNvSpPr>
+            <a:spLocks noGrp="1"/>
+          </p:cNvSpPr>
+          <p:nvPr>
+            <p:ph type="dt" sz="half" idx="10"/>
+          </p:nvPr>
+        </p:nvSpPr>
+        <p:spPr/>
+        <p:txBody>
+          <a:bodyPr/>
+          <a:lstStyle/>
+          <a:p>
+            <a:fld id="{DAB5A13C-17B4-48A4-AF5F-EEE8ED69FC02}" type="datetimeFigureOut">
+              <a:rPr lang="en-US" smtClean="0"/>
+              <a:t>7/14/2026</a:t>
+            </a:fld>
+            <a:endParaRPr lang="en-US"/>
+          </a:p>
+        </p:txBody>
+      </p:sp>
+      <p:sp>
+        <p:nvSpPr>
+          <p:cNvPr id="5" name="Footer Placeholder 4"/>
+          <p:cNvSpPr>
+            <a:spLocks noGrp="1"/>
+          </p:cNvSpPr>
+          <p:nvPr>
+            <p:ph type="ftr" sz="quarter" idx="11"/>
+          </p:nvPr>
+        </p:nvSpPr>
+        <p:spPr/>
+        <p:txBody>
+          <a:bodyPr/>
+          <a:lstStyle/>
+          <a:p>
+            <a:endParaRPr lang="en-US"/>
+          </a:p>
+        </p:txBody>
+      </p:sp>
+      <p:sp>
+        <p:nvSpPr>
+          <p:cNvPr id="6" name="Slide Number Placeholder 5"/>
+          <p:cNvSpPr>
+            <a:spLocks noGrp="1"/>
+          </p:cNvSpPr>
+          <p:nvPr>
+            <p:ph type="sldNum" sz="quarter" idx="12"/>
+          </p:nvPr>
+        </p:nvSpPr>
+        <p:spPr/>
+        <p:txBody>
+          <a:bodyPr/>
+          <a:lstStyle/>
+          <a:p>
+            <a:fld id="{9DDC1F40-31FB-4487-81C0-94B40DAEFA1D}" type="slidenum">
+              <a:rPr lang="en-US" smtClean="0"/>
+              <a:t>‹#›</a:t>
+            </a:fld>
+            <a:endParaRPr lang="en-US"/>
+          </a:p>
+        </p:txBody>
+      </p:sp>
+    </p:spTree>
+    <p:extLst>
+      <p:ext uri="{BB962C8B-B14F-4D97-AF65-F5344CB8AC3E}">
+        <p14:creationId xmlns:p14="http://schemas.microsoft.com/office/powerpoint/2010/main" val="3423810615"/>
+      </p:ext>
+    </p:extLst>
+  </p:cSld>
+  <p:clrMapOvr>
+    <a:masterClrMapping/>
+  </p:clrMapOvr>
+  <p:hf sldNum="0" hdr="0" ftr="0" dt="0"/>
+</p:sldLayout>
+</file>
+
+<file path=ppt/slideLayouts/slideLayout11.xml><?xml version="1.0" encoding="utf-8"?>
+<p:sldLayout xmlns:a="http://schemas.openxmlformats.org/drawingml/2006/main" xmlns:r="http://schemas.openxmlformats.org/officeDocument/2006/relationships" xmlns:p="http://schemas.openxmlformats.org/presentationml/2006/main" type="vertTitleAndTx" preserve="1">
+  <p:cSld name="Vertical Title and Text">
+    <p:spTree>
+      <p:nvGrpSpPr>
+        <p:cNvPr id="1" name=""/>
+        <p:cNvGrpSpPr/>
+        <p:nvPr/>
+      </p:nvGrpSpPr>
+      <p:grpSpPr>
+        <a:xfrm>
+          <a:off x="0" y="0"/>
+          <a:ext cx="0" cy="0"/>
+          <a:chOff x="0" y="0"/>
+          <a:chExt cx="0" cy="0"/>
+        </a:xfrm>
+      </p:grpSpPr>
+      <p:sp>
+        <p:nvSpPr>
+          <p:cNvPr id="2" name="Vertical Title 1"/>
+          <p:cNvSpPr>
+            <a:spLocks noGrp="1"/>
+          </p:cNvSpPr>
+          <p:nvPr>
+            <p:ph type="title" orient="vert"/>
+          </p:nvPr>
+        </p:nvSpPr>
+        <p:spPr>
+          <a:xfrm>
+            <a:off x="8724900" y="365125"/>
+            <a:ext cx="2628900" cy="5811838"/>
+          </a:xfrm>
+        </p:spPr>
+        <p:txBody>
+          <a:bodyPr vert="eaVert"/>
+          <a:lstStyle/>
+          <a:p>
+            <a:r>
+              <a:rPr lang="en-US"/>
+              <a:t>Click to edit Master title style</a:t>
+            </a:r>
+            <a:endParaRPr lang="en-US" dirty="0"/>
+          </a:p>
+        </p:txBody>
+      </p:sp>
+      <p:sp>
+        <p:nvSpPr>
+          <p:cNvPr id="3" name="Vertical Text Placeholder 2"/>
+          <p:cNvSpPr>
+            <a:spLocks noGrp="1"/>
+          </p:cNvSpPr>
+          <p:nvPr>
+            <p:ph type="body" orient="vert" idx="1"/>
+          </p:nvPr>
+        </p:nvSpPr>
+        <p:spPr>
+          <a:xfrm>
+            <a:off x="838200" y="365125"/>
+            <a:ext cx="7734300" cy="5811838"/>
+          </a:xfrm>
+        </p:spPr>
+        <p:txBody>
+          <a:bodyPr vert="eaVert"/>
+          <a:lstStyle/>
+          <a:p>
+            <a:pPr lvl="0"/>
+            <a:r>
+              <a:rPr lang="en-US"/>
+              <a:t>Click to edit Master text styles</a:t>
+            </a:r>
+          </a:p>
+          <a:p>
+            <a:pPr lvl="1"/>
+            <a:r>
+              <a:rPr lang="en-US"/>
+              <a:t>Second level</a:t>
+            </a:r>
+          </a:p>
+          <a:p>
+            <a:pPr lvl="2"/>
+            <a:r>
+              <a:rPr lang="en-US"/>
+              <a:t>Third level</a:t>
+            </a:r>
+          </a:p>
+          <a:p>
+            <a:pPr lvl="3"/>
+            <a:r>
+              <a:rPr lang="en-US"/>
+              <a:t>Fourth level</a:t>
+            </a:r>
+          </a:p>
+          <a:p>
+            <a:pPr lvl="4"/>
+            <a:r>
+              <a:rPr lang="en-US"/>
+              <a:t>Fifth level</a:t>
+            </a:r>
+            <a:endParaRPr lang="en-US" dirty="0"/>
+          </a:p>
+        </p:txBody>
+      </p:sp>
+      <p:sp>
+        <p:nvSpPr>
+          <p:cNvPr id="4" name="Date Placeholder 3"/>
+          <p:cNvSpPr>
+            <a:spLocks noGrp="1"/>
+          </p:cNvSpPr>
+          <p:nvPr>
+            <p:ph type="dt" sz="half" idx="10"/>
+          </p:nvPr>
+        </p:nvSpPr>
+        <p:spPr/>
+        <p:txBody>
+          <a:bodyPr/>
+          <a:lstStyle/>
+          <a:p>
+            <a:fld id="{DAB5A13C-17B4-48A4-AF5F-EEE8ED69FC02}" type="datetimeFigureOut">
+              <a:rPr lang="en-US" smtClean="0"/>
+              <a:t>7/14/2026</a:t>
+            </a:fld>
+            <a:endParaRPr lang="en-US"/>
+          </a:p>
+        </p:txBody>
+      </p:sp>
+      <p:sp>
+        <p:nvSpPr>
+          <p:cNvPr id="5" name="Footer Placeholder 4"/>
+          <p:cNvSpPr>
+            <a:spLocks noGrp="1"/>
+          </p:cNvSpPr>
+          <p:nvPr>
+            <p:ph type="ftr" sz="quarter" idx="11"/>
+          </p:nvPr>
+        </p:nvSpPr>
+        <p:spPr/>
+        <p:txBody>
+          <a:bodyPr/>
+          <a:lstStyle/>
+          <a:p>
+            <a:endParaRPr lang="en-US"/>
+          </a:p>
+        </p:txBody>
+      </p:sp>
+      <p:sp>
+        <p:nvSpPr>
+          <p:cNvPr id="6" name="Slide Number Placeholder 5"/>
+          <p:cNvSpPr>
+            <a:spLocks noGrp="1"/>
+          </p:cNvSpPr>
+          <p:nvPr>
+            <p:ph type="sldNum" sz="quarter" idx="12"/>
+          </p:nvPr>
+        </p:nvSpPr>
+        <p:spPr/>
+        <p:txBody>
+          <a:bodyPr/>
+          <a:lstStyle/>
+          <a:p>
+            <a:fld id="{9DDC1F40-31FB-4487-81C0-94B40DAEFA1D}" type="slidenum">
+              <a:rPr lang="en-US" smtClean="0"/>
+              <a:t>‹#›</a:t>
+            </a:fld>
+            <a:endParaRPr lang="en-US"/>
+          </a:p>
+        </p:txBody>
+      </p:sp>
+    </p:spTree>
+    <p:extLst>
+      <p:ext uri="{BB962C8B-B14F-4D97-AF65-F5344CB8AC3E}">
+        <p14:creationId xmlns:p14="http://schemas.microsoft.com/office/powerpoint/2010/main" val="3391285019"/>
+      </p:ext>
+    </p:extLst>
+  </p:cSld>
+  <p:clrMapOvr>
+    <a:masterClrMapping/>
+  </p:clrMapOvr>
+  <p:hf sldNum="0" hdr="0" ftr="0" dt="0"/>
+</p:sldLayout>
+</file>
+
+<file path=ppt/slideLayouts/slideLayout12.xml><?xml version="1.0" encoding="utf-8"?>
+<p:sldLayout xmlns:a="http://schemas.openxmlformats.org/drawingml/2006/main" xmlns:r="http://schemas.openxmlformats.org/officeDocument/2006/relationships" xmlns:p="http://schemas.openxmlformats.org/presentationml/2006/main">
   <p:cSld name="DEFAULT">
     <p:bg>
       <p:bgRef idx="1001">
@@ -31414,10 +31962,1785 @@
         </a:xfrm>
       </p:grpSpPr>
     </p:spTree>
+    <p:extLst>
+      <p:ext uri="{BB962C8B-B14F-4D97-AF65-F5344CB8AC3E}">
+        <p14:creationId xmlns:p14="http://schemas.microsoft.com/office/powerpoint/2010/main" val="1008634071"/>
+      </p:ext>
+    </p:extLst>
   </p:cSld>
   <p:clrMapOvr>
     <a:masterClrMapping/>
   </p:clrMapOvr>
+</p:sldLayout>
+</file>
+
+<file path=ppt/slideLayouts/slideLayout2.xml><?xml version="1.0" encoding="utf-8"?>
+<p:sldLayout xmlns:a="http://schemas.openxmlformats.org/drawingml/2006/main" xmlns:r="http://schemas.openxmlformats.org/officeDocument/2006/relationships" xmlns:p="http://schemas.openxmlformats.org/presentationml/2006/main" type="obj" preserve="1">
+  <p:cSld name="Title and Content">
+    <p:spTree>
+      <p:nvGrpSpPr>
+        <p:cNvPr id="1" name=""/>
+        <p:cNvGrpSpPr/>
+        <p:nvPr/>
+      </p:nvGrpSpPr>
+      <p:grpSpPr>
+        <a:xfrm>
+          <a:off x="0" y="0"/>
+          <a:ext cx="0" cy="0"/>
+          <a:chOff x="0" y="0"/>
+          <a:chExt cx="0" cy="0"/>
+        </a:xfrm>
+      </p:grpSpPr>
+      <p:sp>
+        <p:nvSpPr>
+          <p:cNvPr id="2" name="Title 1"/>
+          <p:cNvSpPr>
+            <a:spLocks noGrp="1"/>
+          </p:cNvSpPr>
+          <p:nvPr>
+            <p:ph type="title"/>
+          </p:nvPr>
+        </p:nvSpPr>
+        <p:spPr/>
+        <p:txBody>
+          <a:bodyPr/>
+          <a:lstStyle/>
+          <a:p>
+            <a:r>
+              <a:rPr lang="en-US"/>
+              <a:t>Click to edit Master title style</a:t>
+            </a:r>
+            <a:endParaRPr lang="en-US" dirty="0"/>
+          </a:p>
+        </p:txBody>
+      </p:sp>
+      <p:sp>
+        <p:nvSpPr>
+          <p:cNvPr id="3" name="Content Placeholder 2"/>
+          <p:cNvSpPr>
+            <a:spLocks noGrp="1"/>
+          </p:cNvSpPr>
+          <p:nvPr>
+            <p:ph idx="1"/>
+          </p:nvPr>
+        </p:nvSpPr>
+        <p:spPr/>
+        <p:txBody>
+          <a:bodyPr/>
+          <a:lstStyle/>
+          <a:p>
+            <a:pPr lvl="0"/>
+            <a:r>
+              <a:rPr lang="en-US"/>
+              <a:t>Click to edit Master text styles</a:t>
+            </a:r>
+          </a:p>
+          <a:p>
+            <a:pPr lvl="1"/>
+            <a:r>
+              <a:rPr lang="en-US"/>
+              <a:t>Second level</a:t>
+            </a:r>
+          </a:p>
+          <a:p>
+            <a:pPr lvl="2"/>
+            <a:r>
+              <a:rPr lang="en-US"/>
+              <a:t>Third level</a:t>
+            </a:r>
+          </a:p>
+          <a:p>
+            <a:pPr lvl="3"/>
+            <a:r>
+              <a:rPr lang="en-US"/>
+              <a:t>Fourth level</a:t>
+            </a:r>
+          </a:p>
+          <a:p>
+            <a:pPr lvl="4"/>
+            <a:r>
+              <a:rPr lang="en-US"/>
+              <a:t>Fifth level</a:t>
+            </a:r>
+            <a:endParaRPr lang="en-US" dirty="0"/>
+          </a:p>
+        </p:txBody>
+      </p:sp>
+      <p:sp>
+        <p:nvSpPr>
+          <p:cNvPr id="4" name="Date Placeholder 3"/>
+          <p:cNvSpPr>
+            <a:spLocks noGrp="1"/>
+          </p:cNvSpPr>
+          <p:nvPr>
+            <p:ph type="dt" sz="half" idx="10"/>
+          </p:nvPr>
+        </p:nvSpPr>
+        <p:spPr/>
+        <p:txBody>
+          <a:bodyPr/>
+          <a:lstStyle/>
+          <a:p>
+            <a:fld id="{DAB5A13C-17B4-48A4-AF5F-EEE8ED69FC02}" type="datetimeFigureOut">
+              <a:rPr lang="en-US" smtClean="0"/>
+              <a:t>7/14/2026</a:t>
+            </a:fld>
+            <a:endParaRPr lang="en-US"/>
+          </a:p>
+        </p:txBody>
+      </p:sp>
+      <p:sp>
+        <p:nvSpPr>
+          <p:cNvPr id="5" name="Footer Placeholder 4"/>
+          <p:cNvSpPr>
+            <a:spLocks noGrp="1"/>
+          </p:cNvSpPr>
+          <p:nvPr>
+            <p:ph type="ftr" sz="quarter" idx="11"/>
+          </p:nvPr>
+        </p:nvSpPr>
+        <p:spPr/>
+        <p:txBody>
+          <a:bodyPr/>
+          <a:lstStyle/>
+          <a:p>
+            <a:endParaRPr lang="en-US"/>
+          </a:p>
+        </p:txBody>
+      </p:sp>
+      <p:sp>
+        <p:nvSpPr>
+          <p:cNvPr id="6" name="Slide Number Placeholder 5"/>
+          <p:cNvSpPr>
+            <a:spLocks noGrp="1"/>
+          </p:cNvSpPr>
+          <p:nvPr>
+            <p:ph type="sldNum" sz="quarter" idx="12"/>
+          </p:nvPr>
+        </p:nvSpPr>
+        <p:spPr/>
+        <p:txBody>
+          <a:bodyPr/>
+          <a:lstStyle/>
+          <a:p>
+            <a:fld id="{9DDC1F40-31FB-4487-81C0-94B40DAEFA1D}" type="slidenum">
+              <a:rPr lang="en-US" smtClean="0"/>
+              <a:t>‹#›</a:t>
+            </a:fld>
+            <a:endParaRPr lang="en-US"/>
+          </a:p>
+        </p:txBody>
+      </p:sp>
+    </p:spTree>
+    <p:extLst>
+      <p:ext uri="{BB962C8B-B14F-4D97-AF65-F5344CB8AC3E}">
+        <p14:creationId xmlns:p14="http://schemas.microsoft.com/office/powerpoint/2010/main" val="585186649"/>
+      </p:ext>
+    </p:extLst>
+  </p:cSld>
+  <p:clrMapOvr>
+    <a:masterClrMapping/>
+  </p:clrMapOvr>
+  <p:hf sldNum="0" hdr="0" ftr="0" dt="0"/>
+</p:sldLayout>
+</file>
+
+<file path=ppt/slideLayouts/slideLayout3.xml><?xml version="1.0" encoding="utf-8"?>
+<p:sldLayout xmlns:a="http://schemas.openxmlformats.org/drawingml/2006/main" xmlns:r="http://schemas.openxmlformats.org/officeDocument/2006/relationships" xmlns:p="http://schemas.openxmlformats.org/presentationml/2006/main" type="secHead" preserve="1">
+  <p:cSld name="Section Header">
+    <p:spTree>
+      <p:nvGrpSpPr>
+        <p:cNvPr id="1" name=""/>
+        <p:cNvGrpSpPr/>
+        <p:nvPr/>
+      </p:nvGrpSpPr>
+      <p:grpSpPr>
+        <a:xfrm>
+          <a:off x="0" y="0"/>
+          <a:ext cx="0" cy="0"/>
+          <a:chOff x="0" y="0"/>
+          <a:chExt cx="0" cy="0"/>
+        </a:xfrm>
+      </p:grpSpPr>
+      <p:sp>
+        <p:nvSpPr>
+          <p:cNvPr id="2" name="Title 1"/>
+          <p:cNvSpPr>
+            <a:spLocks noGrp="1"/>
+          </p:cNvSpPr>
+          <p:nvPr>
+            <p:ph type="title"/>
+          </p:nvPr>
+        </p:nvSpPr>
+        <p:spPr>
+          <a:xfrm>
+            <a:off x="831850" y="1709738"/>
+            <a:ext cx="10515600" cy="2852737"/>
+          </a:xfrm>
+        </p:spPr>
+        <p:txBody>
+          <a:bodyPr anchor="b"/>
+          <a:lstStyle>
+            <a:lvl1pPr>
+              <a:defRPr sz="6000"/>
+            </a:lvl1pPr>
+          </a:lstStyle>
+          <a:p>
+            <a:r>
+              <a:rPr lang="en-US"/>
+              <a:t>Click to edit Master title style</a:t>
+            </a:r>
+            <a:endParaRPr lang="en-US" dirty="0"/>
+          </a:p>
+        </p:txBody>
+      </p:sp>
+      <p:sp>
+        <p:nvSpPr>
+          <p:cNvPr id="3" name="Text Placeholder 2"/>
+          <p:cNvSpPr>
+            <a:spLocks noGrp="1"/>
+          </p:cNvSpPr>
+          <p:nvPr>
+            <p:ph type="body" idx="1"/>
+          </p:nvPr>
+        </p:nvSpPr>
+        <p:spPr>
+          <a:xfrm>
+            <a:off x="831850" y="4589463"/>
+            <a:ext cx="10515600" cy="1500187"/>
+          </a:xfrm>
+        </p:spPr>
+        <p:txBody>
+          <a:bodyPr/>
+          <a:lstStyle>
+            <a:lvl1pPr marL="0" indent="0">
+              <a:buNone/>
+              <a:defRPr sz="2400">
+                <a:solidFill>
+                  <a:schemeClr val="tx1">
+                    <a:tint val="82000"/>
+                  </a:schemeClr>
+                </a:solidFill>
+              </a:defRPr>
+            </a:lvl1pPr>
+            <a:lvl2pPr marL="457200" indent="0">
+              <a:buNone/>
+              <a:defRPr sz="2000">
+                <a:solidFill>
+                  <a:schemeClr val="tx1">
+                    <a:tint val="82000"/>
+                  </a:schemeClr>
+                </a:solidFill>
+              </a:defRPr>
+            </a:lvl2pPr>
+            <a:lvl3pPr marL="914400" indent="0">
+              <a:buNone/>
+              <a:defRPr sz="1800">
+                <a:solidFill>
+                  <a:schemeClr val="tx1">
+                    <a:tint val="82000"/>
+                  </a:schemeClr>
+                </a:solidFill>
+              </a:defRPr>
+            </a:lvl3pPr>
+            <a:lvl4pPr marL="1371600" indent="0">
+              <a:buNone/>
+              <a:defRPr sz="1600">
+                <a:solidFill>
+                  <a:schemeClr val="tx1">
+                    <a:tint val="82000"/>
+                  </a:schemeClr>
+                </a:solidFill>
+              </a:defRPr>
+            </a:lvl4pPr>
+            <a:lvl5pPr marL="1828800" indent="0">
+              <a:buNone/>
+              <a:defRPr sz="1600">
+                <a:solidFill>
+                  <a:schemeClr val="tx1">
+                    <a:tint val="82000"/>
+                  </a:schemeClr>
+                </a:solidFill>
+              </a:defRPr>
+            </a:lvl5pPr>
+            <a:lvl6pPr marL="2286000" indent="0">
+              <a:buNone/>
+              <a:defRPr sz="1600">
+                <a:solidFill>
+                  <a:schemeClr val="tx1">
+                    <a:tint val="82000"/>
+                  </a:schemeClr>
+                </a:solidFill>
+              </a:defRPr>
+            </a:lvl6pPr>
+            <a:lvl7pPr marL="2743200" indent="0">
+              <a:buNone/>
+              <a:defRPr sz="1600">
+                <a:solidFill>
+                  <a:schemeClr val="tx1">
+                    <a:tint val="82000"/>
+                  </a:schemeClr>
+                </a:solidFill>
+              </a:defRPr>
+            </a:lvl7pPr>
+            <a:lvl8pPr marL="3200400" indent="0">
+              <a:buNone/>
+              <a:defRPr sz="1600">
+                <a:solidFill>
+                  <a:schemeClr val="tx1">
+                    <a:tint val="82000"/>
+                  </a:schemeClr>
+                </a:solidFill>
+              </a:defRPr>
+            </a:lvl8pPr>
+            <a:lvl9pPr marL="3657600" indent="0">
+              <a:buNone/>
+              <a:defRPr sz="1600">
+                <a:solidFill>
+                  <a:schemeClr val="tx1">
+                    <a:tint val="82000"/>
+                  </a:schemeClr>
+                </a:solidFill>
+              </a:defRPr>
+            </a:lvl9pPr>
+          </a:lstStyle>
+          <a:p>
+            <a:pPr lvl="0"/>
+            <a:r>
+              <a:rPr lang="en-US"/>
+              <a:t>Click to edit Master text styles</a:t>
+            </a:r>
+          </a:p>
+        </p:txBody>
+      </p:sp>
+      <p:sp>
+        <p:nvSpPr>
+          <p:cNvPr id="4" name="Date Placeholder 3"/>
+          <p:cNvSpPr>
+            <a:spLocks noGrp="1"/>
+          </p:cNvSpPr>
+          <p:nvPr>
+            <p:ph type="dt" sz="half" idx="10"/>
+          </p:nvPr>
+        </p:nvSpPr>
+        <p:spPr/>
+        <p:txBody>
+          <a:bodyPr/>
+          <a:lstStyle/>
+          <a:p>
+            <a:fld id="{DAB5A13C-17B4-48A4-AF5F-EEE8ED69FC02}" type="datetimeFigureOut">
+              <a:rPr lang="en-US" smtClean="0"/>
+              <a:t>7/14/2026</a:t>
+            </a:fld>
+            <a:endParaRPr lang="en-US"/>
+          </a:p>
+        </p:txBody>
+      </p:sp>
+      <p:sp>
+        <p:nvSpPr>
+          <p:cNvPr id="5" name="Footer Placeholder 4"/>
+          <p:cNvSpPr>
+            <a:spLocks noGrp="1"/>
+          </p:cNvSpPr>
+          <p:nvPr>
+            <p:ph type="ftr" sz="quarter" idx="11"/>
+          </p:nvPr>
+        </p:nvSpPr>
+        <p:spPr/>
+        <p:txBody>
+          <a:bodyPr/>
+          <a:lstStyle/>
+          <a:p>
+            <a:endParaRPr lang="en-US"/>
+          </a:p>
+        </p:txBody>
+      </p:sp>
+      <p:sp>
+        <p:nvSpPr>
+          <p:cNvPr id="6" name="Slide Number Placeholder 5"/>
+          <p:cNvSpPr>
+            <a:spLocks noGrp="1"/>
+          </p:cNvSpPr>
+          <p:nvPr>
+            <p:ph type="sldNum" sz="quarter" idx="12"/>
+          </p:nvPr>
+        </p:nvSpPr>
+        <p:spPr/>
+        <p:txBody>
+          <a:bodyPr/>
+          <a:lstStyle/>
+          <a:p>
+            <a:fld id="{9DDC1F40-31FB-4487-81C0-94B40DAEFA1D}" type="slidenum">
+              <a:rPr lang="en-US" smtClean="0"/>
+              <a:t>‹#›</a:t>
+            </a:fld>
+            <a:endParaRPr lang="en-US"/>
+          </a:p>
+        </p:txBody>
+      </p:sp>
+    </p:spTree>
+    <p:extLst>
+      <p:ext uri="{BB962C8B-B14F-4D97-AF65-F5344CB8AC3E}">
+        <p14:creationId xmlns:p14="http://schemas.microsoft.com/office/powerpoint/2010/main" val="2560666617"/>
+      </p:ext>
+    </p:extLst>
+  </p:cSld>
+  <p:clrMapOvr>
+    <a:masterClrMapping/>
+  </p:clrMapOvr>
+  <p:hf sldNum="0" hdr="0" ftr="0" dt="0"/>
+</p:sldLayout>
+</file>
+
+<file path=ppt/slideLayouts/slideLayout4.xml><?xml version="1.0" encoding="utf-8"?>
+<p:sldLayout xmlns:a="http://schemas.openxmlformats.org/drawingml/2006/main" xmlns:r="http://schemas.openxmlformats.org/officeDocument/2006/relationships" xmlns:p="http://schemas.openxmlformats.org/presentationml/2006/main" type="twoObj" preserve="1">
+  <p:cSld name="Two Content">
+    <p:spTree>
+      <p:nvGrpSpPr>
+        <p:cNvPr id="1" name=""/>
+        <p:cNvGrpSpPr/>
+        <p:nvPr/>
+      </p:nvGrpSpPr>
+      <p:grpSpPr>
+        <a:xfrm>
+          <a:off x="0" y="0"/>
+          <a:ext cx="0" cy="0"/>
+          <a:chOff x="0" y="0"/>
+          <a:chExt cx="0" cy="0"/>
+        </a:xfrm>
+      </p:grpSpPr>
+      <p:sp>
+        <p:nvSpPr>
+          <p:cNvPr id="2" name="Title 1"/>
+          <p:cNvSpPr>
+            <a:spLocks noGrp="1"/>
+          </p:cNvSpPr>
+          <p:nvPr>
+            <p:ph type="title"/>
+          </p:nvPr>
+        </p:nvSpPr>
+        <p:spPr/>
+        <p:txBody>
+          <a:bodyPr/>
+          <a:lstStyle/>
+          <a:p>
+            <a:r>
+              <a:rPr lang="en-US"/>
+              <a:t>Click to edit Master title style</a:t>
+            </a:r>
+            <a:endParaRPr lang="en-US" dirty="0"/>
+          </a:p>
+        </p:txBody>
+      </p:sp>
+      <p:sp>
+        <p:nvSpPr>
+          <p:cNvPr id="3" name="Content Placeholder 2"/>
+          <p:cNvSpPr>
+            <a:spLocks noGrp="1"/>
+          </p:cNvSpPr>
+          <p:nvPr>
+            <p:ph sz="half" idx="1"/>
+          </p:nvPr>
+        </p:nvSpPr>
+        <p:spPr>
+          <a:xfrm>
+            <a:off x="838200" y="1825625"/>
+            <a:ext cx="5181600" cy="4351338"/>
+          </a:xfrm>
+        </p:spPr>
+        <p:txBody>
+          <a:bodyPr/>
+          <a:lstStyle/>
+          <a:p>
+            <a:pPr lvl="0"/>
+            <a:r>
+              <a:rPr lang="en-US"/>
+              <a:t>Click to edit Master text styles</a:t>
+            </a:r>
+          </a:p>
+          <a:p>
+            <a:pPr lvl="1"/>
+            <a:r>
+              <a:rPr lang="en-US"/>
+              <a:t>Second level</a:t>
+            </a:r>
+          </a:p>
+          <a:p>
+            <a:pPr lvl="2"/>
+            <a:r>
+              <a:rPr lang="en-US"/>
+              <a:t>Third level</a:t>
+            </a:r>
+          </a:p>
+          <a:p>
+            <a:pPr lvl="3"/>
+            <a:r>
+              <a:rPr lang="en-US"/>
+              <a:t>Fourth level</a:t>
+            </a:r>
+          </a:p>
+          <a:p>
+            <a:pPr lvl="4"/>
+            <a:r>
+              <a:rPr lang="en-US"/>
+              <a:t>Fifth level</a:t>
+            </a:r>
+            <a:endParaRPr lang="en-US" dirty="0"/>
+          </a:p>
+        </p:txBody>
+      </p:sp>
+      <p:sp>
+        <p:nvSpPr>
+          <p:cNvPr id="4" name="Content Placeholder 3"/>
+          <p:cNvSpPr>
+            <a:spLocks noGrp="1"/>
+          </p:cNvSpPr>
+          <p:nvPr>
+            <p:ph sz="half" idx="2"/>
+          </p:nvPr>
+        </p:nvSpPr>
+        <p:spPr>
+          <a:xfrm>
+            <a:off x="6172200" y="1825625"/>
+            <a:ext cx="5181600" cy="4351338"/>
+          </a:xfrm>
+        </p:spPr>
+        <p:txBody>
+          <a:bodyPr/>
+          <a:lstStyle/>
+          <a:p>
+            <a:pPr lvl="0"/>
+            <a:r>
+              <a:rPr lang="en-US"/>
+              <a:t>Click to edit Master text styles</a:t>
+            </a:r>
+          </a:p>
+          <a:p>
+            <a:pPr lvl="1"/>
+            <a:r>
+              <a:rPr lang="en-US"/>
+              <a:t>Second level</a:t>
+            </a:r>
+          </a:p>
+          <a:p>
+            <a:pPr lvl="2"/>
+            <a:r>
+              <a:rPr lang="en-US"/>
+              <a:t>Third level</a:t>
+            </a:r>
+          </a:p>
+          <a:p>
+            <a:pPr lvl="3"/>
+            <a:r>
+              <a:rPr lang="en-US"/>
+              <a:t>Fourth level</a:t>
+            </a:r>
+          </a:p>
+          <a:p>
+            <a:pPr lvl="4"/>
+            <a:r>
+              <a:rPr lang="en-US"/>
+              <a:t>Fifth level</a:t>
+            </a:r>
+            <a:endParaRPr lang="en-US" dirty="0"/>
+          </a:p>
+        </p:txBody>
+      </p:sp>
+      <p:sp>
+        <p:nvSpPr>
+          <p:cNvPr id="5" name="Date Placeholder 4"/>
+          <p:cNvSpPr>
+            <a:spLocks noGrp="1"/>
+          </p:cNvSpPr>
+          <p:nvPr>
+            <p:ph type="dt" sz="half" idx="10"/>
+          </p:nvPr>
+        </p:nvSpPr>
+        <p:spPr/>
+        <p:txBody>
+          <a:bodyPr/>
+          <a:lstStyle/>
+          <a:p>
+            <a:fld id="{DAB5A13C-17B4-48A4-AF5F-EEE8ED69FC02}" type="datetimeFigureOut">
+              <a:rPr lang="en-US" smtClean="0"/>
+              <a:t>7/14/2026</a:t>
+            </a:fld>
+            <a:endParaRPr lang="en-US"/>
+          </a:p>
+        </p:txBody>
+      </p:sp>
+      <p:sp>
+        <p:nvSpPr>
+          <p:cNvPr id="6" name="Footer Placeholder 5"/>
+          <p:cNvSpPr>
+            <a:spLocks noGrp="1"/>
+          </p:cNvSpPr>
+          <p:nvPr>
+            <p:ph type="ftr" sz="quarter" idx="11"/>
+          </p:nvPr>
+        </p:nvSpPr>
+        <p:spPr/>
+        <p:txBody>
+          <a:bodyPr/>
+          <a:lstStyle/>
+          <a:p>
+            <a:endParaRPr lang="en-US"/>
+          </a:p>
+        </p:txBody>
+      </p:sp>
+      <p:sp>
+        <p:nvSpPr>
+          <p:cNvPr id="7" name="Slide Number Placeholder 6"/>
+          <p:cNvSpPr>
+            <a:spLocks noGrp="1"/>
+          </p:cNvSpPr>
+          <p:nvPr>
+            <p:ph type="sldNum" sz="quarter" idx="12"/>
+          </p:nvPr>
+        </p:nvSpPr>
+        <p:spPr/>
+        <p:txBody>
+          <a:bodyPr/>
+          <a:lstStyle/>
+          <a:p>
+            <a:fld id="{9DDC1F40-31FB-4487-81C0-94B40DAEFA1D}" type="slidenum">
+              <a:rPr lang="en-US" smtClean="0"/>
+              <a:t>‹#›</a:t>
+            </a:fld>
+            <a:endParaRPr lang="en-US"/>
+          </a:p>
+        </p:txBody>
+      </p:sp>
+    </p:spTree>
+    <p:extLst>
+      <p:ext uri="{BB962C8B-B14F-4D97-AF65-F5344CB8AC3E}">
+        <p14:creationId xmlns:p14="http://schemas.microsoft.com/office/powerpoint/2010/main" val="1589966489"/>
+      </p:ext>
+    </p:extLst>
+  </p:cSld>
+  <p:clrMapOvr>
+    <a:masterClrMapping/>
+  </p:clrMapOvr>
+  <p:hf sldNum="0" hdr="0" ftr="0" dt="0"/>
+</p:sldLayout>
+</file>
+
+<file path=ppt/slideLayouts/slideLayout5.xml><?xml version="1.0" encoding="utf-8"?>
+<p:sldLayout xmlns:a="http://schemas.openxmlformats.org/drawingml/2006/main" xmlns:r="http://schemas.openxmlformats.org/officeDocument/2006/relationships" xmlns:p="http://schemas.openxmlformats.org/presentationml/2006/main" type="twoTxTwoObj" preserve="1">
+  <p:cSld name="Comparison">
+    <p:spTree>
+      <p:nvGrpSpPr>
+        <p:cNvPr id="1" name=""/>
+        <p:cNvGrpSpPr/>
+        <p:nvPr/>
+      </p:nvGrpSpPr>
+      <p:grpSpPr>
+        <a:xfrm>
+          <a:off x="0" y="0"/>
+          <a:ext cx="0" cy="0"/>
+          <a:chOff x="0" y="0"/>
+          <a:chExt cx="0" cy="0"/>
+        </a:xfrm>
+      </p:grpSpPr>
+      <p:sp>
+        <p:nvSpPr>
+          <p:cNvPr id="2" name="Title 1"/>
+          <p:cNvSpPr>
+            <a:spLocks noGrp="1"/>
+          </p:cNvSpPr>
+          <p:nvPr>
+            <p:ph type="title"/>
+          </p:nvPr>
+        </p:nvSpPr>
+        <p:spPr>
+          <a:xfrm>
+            <a:off x="839788" y="365125"/>
+            <a:ext cx="10515600" cy="1325563"/>
+          </a:xfrm>
+        </p:spPr>
+        <p:txBody>
+          <a:bodyPr/>
+          <a:lstStyle/>
+          <a:p>
+            <a:r>
+              <a:rPr lang="en-US"/>
+              <a:t>Click to edit Master title style</a:t>
+            </a:r>
+            <a:endParaRPr lang="en-US" dirty="0"/>
+          </a:p>
+        </p:txBody>
+      </p:sp>
+      <p:sp>
+        <p:nvSpPr>
+          <p:cNvPr id="3" name="Text Placeholder 2"/>
+          <p:cNvSpPr>
+            <a:spLocks noGrp="1"/>
+          </p:cNvSpPr>
+          <p:nvPr>
+            <p:ph type="body" idx="1"/>
+          </p:nvPr>
+        </p:nvSpPr>
+        <p:spPr>
+          <a:xfrm>
+            <a:off x="839788" y="1681163"/>
+            <a:ext cx="5157787" cy="823912"/>
+          </a:xfrm>
+        </p:spPr>
+        <p:txBody>
+          <a:bodyPr anchor="b"/>
+          <a:lstStyle>
+            <a:lvl1pPr marL="0" indent="0">
+              <a:buNone/>
+              <a:defRPr sz="2400" b="1"/>
+            </a:lvl1pPr>
+            <a:lvl2pPr marL="457200" indent="0">
+              <a:buNone/>
+              <a:defRPr sz="2000" b="1"/>
+            </a:lvl2pPr>
+            <a:lvl3pPr marL="914400" indent="0">
+              <a:buNone/>
+              <a:defRPr sz="1800" b="1"/>
+            </a:lvl3pPr>
+            <a:lvl4pPr marL="1371600" indent="0">
+              <a:buNone/>
+              <a:defRPr sz="1600" b="1"/>
+            </a:lvl4pPr>
+            <a:lvl5pPr marL="1828800" indent="0">
+              <a:buNone/>
+              <a:defRPr sz="1600" b="1"/>
+            </a:lvl5pPr>
+            <a:lvl6pPr marL="2286000" indent="0">
+              <a:buNone/>
+              <a:defRPr sz="1600" b="1"/>
+            </a:lvl6pPr>
+            <a:lvl7pPr marL="2743200" indent="0">
+              <a:buNone/>
+              <a:defRPr sz="1600" b="1"/>
+            </a:lvl7pPr>
+            <a:lvl8pPr marL="3200400" indent="0">
+              <a:buNone/>
+              <a:defRPr sz="1600" b="1"/>
+            </a:lvl8pPr>
+            <a:lvl9pPr marL="3657600" indent="0">
+              <a:buNone/>
+              <a:defRPr sz="1600" b="1"/>
+            </a:lvl9pPr>
+          </a:lstStyle>
+          <a:p>
+            <a:pPr lvl="0"/>
+            <a:r>
+              <a:rPr lang="en-US"/>
+              <a:t>Click to edit Master text styles</a:t>
+            </a:r>
+          </a:p>
+        </p:txBody>
+      </p:sp>
+      <p:sp>
+        <p:nvSpPr>
+          <p:cNvPr id="4" name="Content Placeholder 3"/>
+          <p:cNvSpPr>
+            <a:spLocks noGrp="1"/>
+          </p:cNvSpPr>
+          <p:nvPr>
+            <p:ph sz="half" idx="2"/>
+          </p:nvPr>
+        </p:nvSpPr>
+        <p:spPr>
+          <a:xfrm>
+            <a:off x="839788" y="2505075"/>
+            <a:ext cx="5157787" cy="3684588"/>
+          </a:xfrm>
+        </p:spPr>
+        <p:txBody>
+          <a:bodyPr/>
+          <a:lstStyle/>
+          <a:p>
+            <a:pPr lvl="0"/>
+            <a:r>
+              <a:rPr lang="en-US"/>
+              <a:t>Click to edit Master text styles</a:t>
+            </a:r>
+          </a:p>
+          <a:p>
+            <a:pPr lvl="1"/>
+            <a:r>
+              <a:rPr lang="en-US"/>
+              <a:t>Second level</a:t>
+            </a:r>
+          </a:p>
+          <a:p>
+            <a:pPr lvl="2"/>
+            <a:r>
+              <a:rPr lang="en-US"/>
+              <a:t>Third level</a:t>
+            </a:r>
+          </a:p>
+          <a:p>
+            <a:pPr lvl="3"/>
+            <a:r>
+              <a:rPr lang="en-US"/>
+              <a:t>Fourth level</a:t>
+            </a:r>
+          </a:p>
+          <a:p>
+            <a:pPr lvl="4"/>
+            <a:r>
+              <a:rPr lang="en-US"/>
+              <a:t>Fifth level</a:t>
+            </a:r>
+            <a:endParaRPr lang="en-US" dirty="0"/>
+          </a:p>
+        </p:txBody>
+      </p:sp>
+      <p:sp>
+        <p:nvSpPr>
+          <p:cNvPr id="5" name="Text Placeholder 4"/>
+          <p:cNvSpPr>
+            <a:spLocks noGrp="1"/>
+          </p:cNvSpPr>
+          <p:nvPr>
+            <p:ph type="body" sz="quarter" idx="3"/>
+          </p:nvPr>
+        </p:nvSpPr>
+        <p:spPr>
+          <a:xfrm>
+            <a:off x="6172200" y="1681163"/>
+            <a:ext cx="5183188" cy="823912"/>
+          </a:xfrm>
+        </p:spPr>
+        <p:txBody>
+          <a:bodyPr anchor="b"/>
+          <a:lstStyle>
+            <a:lvl1pPr marL="0" indent="0">
+              <a:buNone/>
+              <a:defRPr sz="2400" b="1"/>
+            </a:lvl1pPr>
+            <a:lvl2pPr marL="457200" indent="0">
+              <a:buNone/>
+              <a:defRPr sz="2000" b="1"/>
+            </a:lvl2pPr>
+            <a:lvl3pPr marL="914400" indent="0">
+              <a:buNone/>
+              <a:defRPr sz="1800" b="1"/>
+            </a:lvl3pPr>
+            <a:lvl4pPr marL="1371600" indent="0">
+              <a:buNone/>
+              <a:defRPr sz="1600" b="1"/>
+            </a:lvl4pPr>
+            <a:lvl5pPr marL="1828800" indent="0">
+              <a:buNone/>
+              <a:defRPr sz="1600" b="1"/>
+            </a:lvl5pPr>
+            <a:lvl6pPr marL="2286000" indent="0">
+              <a:buNone/>
+              <a:defRPr sz="1600" b="1"/>
+            </a:lvl6pPr>
+            <a:lvl7pPr marL="2743200" indent="0">
+              <a:buNone/>
+              <a:defRPr sz="1600" b="1"/>
+            </a:lvl7pPr>
+            <a:lvl8pPr marL="3200400" indent="0">
+              <a:buNone/>
+              <a:defRPr sz="1600" b="1"/>
+            </a:lvl8pPr>
+            <a:lvl9pPr marL="3657600" indent="0">
+              <a:buNone/>
+              <a:defRPr sz="1600" b="1"/>
+            </a:lvl9pPr>
+          </a:lstStyle>
+          <a:p>
+            <a:pPr lvl="0"/>
+            <a:r>
+              <a:rPr lang="en-US"/>
+              <a:t>Click to edit Master text styles</a:t>
+            </a:r>
+          </a:p>
+        </p:txBody>
+      </p:sp>
+      <p:sp>
+        <p:nvSpPr>
+          <p:cNvPr id="6" name="Content Placeholder 5"/>
+          <p:cNvSpPr>
+            <a:spLocks noGrp="1"/>
+          </p:cNvSpPr>
+          <p:nvPr>
+            <p:ph sz="quarter" idx="4"/>
+          </p:nvPr>
+        </p:nvSpPr>
+        <p:spPr>
+          <a:xfrm>
+            <a:off x="6172200" y="2505075"/>
+            <a:ext cx="5183188" cy="3684588"/>
+          </a:xfrm>
+        </p:spPr>
+        <p:txBody>
+          <a:bodyPr/>
+          <a:lstStyle/>
+          <a:p>
+            <a:pPr lvl="0"/>
+            <a:r>
+              <a:rPr lang="en-US"/>
+              <a:t>Click to edit Master text styles</a:t>
+            </a:r>
+          </a:p>
+          <a:p>
+            <a:pPr lvl="1"/>
+            <a:r>
+              <a:rPr lang="en-US"/>
+              <a:t>Second level</a:t>
+            </a:r>
+          </a:p>
+          <a:p>
+            <a:pPr lvl="2"/>
+            <a:r>
+              <a:rPr lang="en-US"/>
+              <a:t>Third level</a:t>
+            </a:r>
+          </a:p>
+          <a:p>
+            <a:pPr lvl="3"/>
+            <a:r>
+              <a:rPr lang="en-US"/>
+              <a:t>Fourth level</a:t>
+            </a:r>
+          </a:p>
+          <a:p>
+            <a:pPr lvl="4"/>
+            <a:r>
+              <a:rPr lang="en-US"/>
+              <a:t>Fifth level</a:t>
+            </a:r>
+            <a:endParaRPr lang="en-US" dirty="0"/>
+          </a:p>
+        </p:txBody>
+      </p:sp>
+      <p:sp>
+        <p:nvSpPr>
+          <p:cNvPr id="7" name="Date Placeholder 6"/>
+          <p:cNvSpPr>
+            <a:spLocks noGrp="1"/>
+          </p:cNvSpPr>
+          <p:nvPr>
+            <p:ph type="dt" sz="half" idx="10"/>
+          </p:nvPr>
+        </p:nvSpPr>
+        <p:spPr/>
+        <p:txBody>
+          <a:bodyPr/>
+          <a:lstStyle/>
+          <a:p>
+            <a:fld id="{DAB5A13C-17B4-48A4-AF5F-EEE8ED69FC02}" type="datetimeFigureOut">
+              <a:rPr lang="en-US" smtClean="0"/>
+              <a:t>7/14/2026</a:t>
+            </a:fld>
+            <a:endParaRPr lang="en-US"/>
+          </a:p>
+        </p:txBody>
+      </p:sp>
+      <p:sp>
+        <p:nvSpPr>
+          <p:cNvPr id="8" name="Footer Placeholder 7"/>
+          <p:cNvSpPr>
+            <a:spLocks noGrp="1"/>
+          </p:cNvSpPr>
+          <p:nvPr>
+            <p:ph type="ftr" sz="quarter" idx="11"/>
+          </p:nvPr>
+        </p:nvSpPr>
+        <p:spPr/>
+        <p:txBody>
+          <a:bodyPr/>
+          <a:lstStyle/>
+          <a:p>
+            <a:endParaRPr lang="en-US"/>
+          </a:p>
+        </p:txBody>
+      </p:sp>
+      <p:sp>
+        <p:nvSpPr>
+          <p:cNvPr id="9" name="Slide Number Placeholder 8"/>
+          <p:cNvSpPr>
+            <a:spLocks noGrp="1"/>
+          </p:cNvSpPr>
+          <p:nvPr>
+            <p:ph type="sldNum" sz="quarter" idx="12"/>
+          </p:nvPr>
+        </p:nvSpPr>
+        <p:spPr/>
+        <p:txBody>
+          <a:bodyPr/>
+          <a:lstStyle/>
+          <a:p>
+            <a:fld id="{9DDC1F40-31FB-4487-81C0-94B40DAEFA1D}" type="slidenum">
+              <a:rPr lang="en-US" smtClean="0"/>
+              <a:t>‹#›</a:t>
+            </a:fld>
+            <a:endParaRPr lang="en-US"/>
+          </a:p>
+        </p:txBody>
+      </p:sp>
+    </p:spTree>
+    <p:extLst>
+      <p:ext uri="{BB962C8B-B14F-4D97-AF65-F5344CB8AC3E}">
+        <p14:creationId xmlns:p14="http://schemas.microsoft.com/office/powerpoint/2010/main" val="642955848"/>
+      </p:ext>
+    </p:extLst>
+  </p:cSld>
+  <p:clrMapOvr>
+    <a:masterClrMapping/>
+  </p:clrMapOvr>
+  <p:hf sldNum="0" hdr="0" ftr="0" dt="0"/>
+</p:sldLayout>
+</file>
+
+<file path=ppt/slideLayouts/slideLayout6.xml><?xml version="1.0" encoding="utf-8"?>
+<p:sldLayout xmlns:a="http://schemas.openxmlformats.org/drawingml/2006/main" xmlns:r="http://schemas.openxmlformats.org/officeDocument/2006/relationships" xmlns:p="http://schemas.openxmlformats.org/presentationml/2006/main" type="titleOnly" preserve="1">
+  <p:cSld name="Title Only">
+    <p:spTree>
+      <p:nvGrpSpPr>
+        <p:cNvPr id="1" name=""/>
+        <p:cNvGrpSpPr/>
+        <p:nvPr/>
+      </p:nvGrpSpPr>
+      <p:grpSpPr>
+        <a:xfrm>
+          <a:off x="0" y="0"/>
+          <a:ext cx="0" cy="0"/>
+          <a:chOff x="0" y="0"/>
+          <a:chExt cx="0" cy="0"/>
+        </a:xfrm>
+      </p:grpSpPr>
+      <p:sp>
+        <p:nvSpPr>
+          <p:cNvPr id="2" name="Title 1"/>
+          <p:cNvSpPr>
+            <a:spLocks noGrp="1"/>
+          </p:cNvSpPr>
+          <p:nvPr>
+            <p:ph type="title"/>
+          </p:nvPr>
+        </p:nvSpPr>
+        <p:spPr/>
+        <p:txBody>
+          <a:bodyPr/>
+          <a:lstStyle/>
+          <a:p>
+            <a:r>
+              <a:rPr lang="en-US"/>
+              <a:t>Click to edit Master title style</a:t>
+            </a:r>
+            <a:endParaRPr lang="en-US" dirty="0"/>
+          </a:p>
+        </p:txBody>
+      </p:sp>
+      <p:sp>
+        <p:nvSpPr>
+          <p:cNvPr id="3" name="Date Placeholder 2"/>
+          <p:cNvSpPr>
+            <a:spLocks noGrp="1"/>
+          </p:cNvSpPr>
+          <p:nvPr>
+            <p:ph type="dt" sz="half" idx="10"/>
+          </p:nvPr>
+        </p:nvSpPr>
+        <p:spPr/>
+        <p:txBody>
+          <a:bodyPr/>
+          <a:lstStyle/>
+          <a:p>
+            <a:fld id="{DAB5A13C-17B4-48A4-AF5F-EEE8ED69FC02}" type="datetimeFigureOut">
+              <a:rPr lang="en-US" smtClean="0"/>
+              <a:t>7/14/2026</a:t>
+            </a:fld>
+            <a:endParaRPr lang="en-US"/>
+          </a:p>
+        </p:txBody>
+      </p:sp>
+      <p:sp>
+        <p:nvSpPr>
+          <p:cNvPr id="4" name="Footer Placeholder 3"/>
+          <p:cNvSpPr>
+            <a:spLocks noGrp="1"/>
+          </p:cNvSpPr>
+          <p:nvPr>
+            <p:ph type="ftr" sz="quarter" idx="11"/>
+          </p:nvPr>
+        </p:nvSpPr>
+        <p:spPr/>
+        <p:txBody>
+          <a:bodyPr/>
+          <a:lstStyle/>
+          <a:p>
+            <a:endParaRPr lang="en-US"/>
+          </a:p>
+        </p:txBody>
+      </p:sp>
+      <p:sp>
+        <p:nvSpPr>
+          <p:cNvPr id="5" name="Slide Number Placeholder 4"/>
+          <p:cNvSpPr>
+            <a:spLocks noGrp="1"/>
+          </p:cNvSpPr>
+          <p:nvPr>
+            <p:ph type="sldNum" sz="quarter" idx="12"/>
+          </p:nvPr>
+        </p:nvSpPr>
+        <p:spPr/>
+        <p:txBody>
+          <a:bodyPr/>
+          <a:lstStyle/>
+          <a:p>
+            <a:fld id="{9DDC1F40-31FB-4487-81C0-94B40DAEFA1D}" type="slidenum">
+              <a:rPr lang="en-US" smtClean="0"/>
+              <a:t>‹#›</a:t>
+            </a:fld>
+            <a:endParaRPr lang="en-US"/>
+          </a:p>
+        </p:txBody>
+      </p:sp>
+    </p:spTree>
+    <p:extLst>
+      <p:ext uri="{BB962C8B-B14F-4D97-AF65-F5344CB8AC3E}">
+        <p14:creationId xmlns:p14="http://schemas.microsoft.com/office/powerpoint/2010/main" val="1752907814"/>
+      </p:ext>
+    </p:extLst>
+  </p:cSld>
+  <p:clrMapOvr>
+    <a:masterClrMapping/>
+  </p:clrMapOvr>
+  <p:hf sldNum="0" hdr="0" ftr="0" dt="0"/>
+</p:sldLayout>
+</file>
+
+<file path=ppt/slideLayouts/slideLayout7.xml><?xml version="1.0" encoding="utf-8"?>
+<p:sldLayout xmlns:a="http://schemas.openxmlformats.org/drawingml/2006/main" xmlns:r="http://schemas.openxmlformats.org/officeDocument/2006/relationships" xmlns:p="http://schemas.openxmlformats.org/presentationml/2006/main" type="blank" preserve="1">
+  <p:cSld name="Blank">
+    <p:spTree>
+      <p:nvGrpSpPr>
+        <p:cNvPr id="1" name=""/>
+        <p:cNvGrpSpPr/>
+        <p:nvPr/>
+      </p:nvGrpSpPr>
+      <p:grpSpPr>
+        <a:xfrm>
+          <a:off x="0" y="0"/>
+          <a:ext cx="0" cy="0"/>
+          <a:chOff x="0" y="0"/>
+          <a:chExt cx="0" cy="0"/>
+        </a:xfrm>
+      </p:grpSpPr>
+      <p:sp>
+        <p:nvSpPr>
+          <p:cNvPr id="2" name="Date Placeholder 1"/>
+          <p:cNvSpPr>
+            <a:spLocks noGrp="1"/>
+          </p:cNvSpPr>
+          <p:nvPr>
+            <p:ph type="dt" sz="half" idx="10"/>
+          </p:nvPr>
+        </p:nvSpPr>
+        <p:spPr/>
+        <p:txBody>
+          <a:bodyPr/>
+          <a:lstStyle/>
+          <a:p>
+            <a:fld id="{DAB5A13C-17B4-48A4-AF5F-EEE8ED69FC02}" type="datetimeFigureOut">
+              <a:rPr lang="en-US" smtClean="0"/>
+              <a:t>7/14/2026</a:t>
+            </a:fld>
+            <a:endParaRPr lang="en-US"/>
+          </a:p>
+        </p:txBody>
+      </p:sp>
+      <p:sp>
+        <p:nvSpPr>
+          <p:cNvPr id="3" name="Footer Placeholder 2"/>
+          <p:cNvSpPr>
+            <a:spLocks noGrp="1"/>
+          </p:cNvSpPr>
+          <p:nvPr>
+            <p:ph type="ftr" sz="quarter" idx="11"/>
+          </p:nvPr>
+        </p:nvSpPr>
+        <p:spPr/>
+        <p:txBody>
+          <a:bodyPr/>
+          <a:lstStyle/>
+          <a:p>
+            <a:endParaRPr lang="en-US"/>
+          </a:p>
+        </p:txBody>
+      </p:sp>
+      <p:sp>
+        <p:nvSpPr>
+          <p:cNvPr id="4" name="Slide Number Placeholder 3"/>
+          <p:cNvSpPr>
+            <a:spLocks noGrp="1"/>
+          </p:cNvSpPr>
+          <p:nvPr>
+            <p:ph type="sldNum" sz="quarter" idx="12"/>
+          </p:nvPr>
+        </p:nvSpPr>
+        <p:spPr/>
+        <p:txBody>
+          <a:bodyPr/>
+          <a:lstStyle/>
+          <a:p>
+            <a:fld id="{9DDC1F40-31FB-4487-81C0-94B40DAEFA1D}" type="slidenum">
+              <a:rPr lang="en-US" smtClean="0"/>
+              <a:t>‹#›</a:t>
+            </a:fld>
+            <a:endParaRPr lang="en-US"/>
+          </a:p>
+        </p:txBody>
+      </p:sp>
+    </p:spTree>
+    <p:extLst>
+      <p:ext uri="{BB962C8B-B14F-4D97-AF65-F5344CB8AC3E}">
+        <p14:creationId xmlns:p14="http://schemas.microsoft.com/office/powerpoint/2010/main" val="698745553"/>
+      </p:ext>
+    </p:extLst>
+  </p:cSld>
+  <p:clrMapOvr>
+    <a:masterClrMapping/>
+  </p:clrMapOvr>
+  <p:hf sldNum="0" hdr="0" ftr="0" dt="0"/>
+</p:sldLayout>
+</file>
+
+<file path=ppt/slideLayouts/slideLayout8.xml><?xml version="1.0" encoding="utf-8"?>
+<p:sldLayout xmlns:a="http://schemas.openxmlformats.org/drawingml/2006/main" xmlns:r="http://schemas.openxmlformats.org/officeDocument/2006/relationships" xmlns:p="http://schemas.openxmlformats.org/presentationml/2006/main" type="objTx" preserve="1">
+  <p:cSld name="Content with Caption">
+    <p:spTree>
+      <p:nvGrpSpPr>
+        <p:cNvPr id="1" name=""/>
+        <p:cNvGrpSpPr/>
+        <p:nvPr/>
+      </p:nvGrpSpPr>
+      <p:grpSpPr>
+        <a:xfrm>
+          <a:off x="0" y="0"/>
+          <a:ext cx="0" cy="0"/>
+          <a:chOff x="0" y="0"/>
+          <a:chExt cx="0" cy="0"/>
+        </a:xfrm>
+      </p:grpSpPr>
+      <p:sp>
+        <p:nvSpPr>
+          <p:cNvPr id="2" name="Title 1"/>
+          <p:cNvSpPr>
+            <a:spLocks noGrp="1"/>
+          </p:cNvSpPr>
+          <p:nvPr>
+            <p:ph type="title"/>
+          </p:nvPr>
+        </p:nvSpPr>
+        <p:spPr>
+          <a:xfrm>
+            <a:off x="839788" y="457200"/>
+            <a:ext cx="3932237" cy="1600200"/>
+          </a:xfrm>
+        </p:spPr>
+        <p:txBody>
+          <a:bodyPr anchor="b"/>
+          <a:lstStyle>
+            <a:lvl1pPr>
+              <a:defRPr sz="3200"/>
+            </a:lvl1pPr>
+          </a:lstStyle>
+          <a:p>
+            <a:r>
+              <a:rPr lang="en-US"/>
+              <a:t>Click to edit Master title style</a:t>
+            </a:r>
+            <a:endParaRPr lang="en-US" dirty="0"/>
+          </a:p>
+        </p:txBody>
+      </p:sp>
+      <p:sp>
+        <p:nvSpPr>
+          <p:cNvPr id="3" name="Content Placeholder 2"/>
+          <p:cNvSpPr>
+            <a:spLocks noGrp="1"/>
+          </p:cNvSpPr>
+          <p:nvPr>
+            <p:ph idx="1"/>
+          </p:nvPr>
+        </p:nvSpPr>
+        <p:spPr>
+          <a:xfrm>
+            <a:off x="5183188" y="987425"/>
+            <a:ext cx="6172200" cy="4873625"/>
+          </a:xfrm>
+        </p:spPr>
+        <p:txBody>
+          <a:bodyPr/>
+          <a:lstStyle>
+            <a:lvl1pPr>
+              <a:defRPr sz="3200"/>
+            </a:lvl1pPr>
+            <a:lvl2pPr>
+              <a:defRPr sz="2800"/>
+            </a:lvl2pPr>
+            <a:lvl3pPr>
+              <a:defRPr sz="2400"/>
+            </a:lvl3pPr>
+            <a:lvl4pPr>
+              <a:defRPr sz="2000"/>
+            </a:lvl4pPr>
+            <a:lvl5pPr>
+              <a:defRPr sz="2000"/>
+            </a:lvl5pPr>
+            <a:lvl6pPr>
+              <a:defRPr sz="2000"/>
+            </a:lvl6pPr>
+            <a:lvl7pPr>
+              <a:defRPr sz="2000"/>
+            </a:lvl7pPr>
+            <a:lvl8pPr>
+              <a:defRPr sz="2000"/>
+            </a:lvl8pPr>
+            <a:lvl9pPr>
+              <a:defRPr sz="2000"/>
+            </a:lvl9pPr>
+          </a:lstStyle>
+          <a:p>
+            <a:pPr lvl="0"/>
+            <a:r>
+              <a:rPr lang="en-US"/>
+              <a:t>Click to edit Master text styles</a:t>
+            </a:r>
+          </a:p>
+          <a:p>
+            <a:pPr lvl="1"/>
+            <a:r>
+              <a:rPr lang="en-US"/>
+              <a:t>Second level</a:t>
+            </a:r>
+          </a:p>
+          <a:p>
+            <a:pPr lvl="2"/>
+            <a:r>
+              <a:rPr lang="en-US"/>
+              <a:t>Third level</a:t>
+            </a:r>
+          </a:p>
+          <a:p>
+            <a:pPr lvl="3"/>
+            <a:r>
+              <a:rPr lang="en-US"/>
+              <a:t>Fourth level</a:t>
+            </a:r>
+          </a:p>
+          <a:p>
+            <a:pPr lvl="4"/>
+            <a:r>
+              <a:rPr lang="en-US"/>
+              <a:t>Fifth level</a:t>
+            </a:r>
+            <a:endParaRPr lang="en-US" dirty="0"/>
+          </a:p>
+        </p:txBody>
+      </p:sp>
+      <p:sp>
+        <p:nvSpPr>
+          <p:cNvPr id="4" name="Text Placeholder 3"/>
+          <p:cNvSpPr>
+            <a:spLocks noGrp="1"/>
+          </p:cNvSpPr>
+          <p:nvPr>
+            <p:ph type="body" sz="half" idx="2"/>
+          </p:nvPr>
+        </p:nvSpPr>
+        <p:spPr>
+          <a:xfrm>
+            <a:off x="839788" y="2057400"/>
+            <a:ext cx="3932237" cy="3811588"/>
+          </a:xfrm>
+        </p:spPr>
+        <p:txBody>
+          <a:bodyPr/>
+          <a:lstStyle>
+            <a:lvl1pPr marL="0" indent="0">
+              <a:buNone/>
+              <a:defRPr sz="1600"/>
+            </a:lvl1pPr>
+            <a:lvl2pPr marL="457200" indent="0">
+              <a:buNone/>
+              <a:defRPr sz="1400"/>
+            </a:lvl2pPr>
+            <a:lvl3pPr marL="914400" indent="0">
+              <a:buNone/>
+              <a:defRPr sz="1200"/>
+            </a:lvl3pPr>
+            <a:lvl4pPr marL="1371600" indent="0">
+              <a:buNone/>
+              <a:defRPr sz="1000"/>
+            </a:lvl4pPr>
+            <a:lvl5pPr marL="1828800" indent="0">
+              <a:buNone/>
+              <a:defRPr sz="1000"/>
+            </a:lvl5pPr>
+            <a:lvl6pPr marL="2286000" indent="0">
+              <a:buNone/>
+              <a:defRPr sz="1000"/>
+            </a:lvl6pPr>
+            <a:lvl7pPr marL="2743200" indent="0">
+              <a:buNone/>
+              <a:defRPr sz="1000"/>
+            </a:lvl7pPr>
+            <a:lvl8pPr marL="3200400" indent="0">
+              <a:buNone/>
+              <a:defRPr sz="1000"/>
+            </a:lvl8pPr>
+            <a:lvl9pPr marL="3657600" indent="0">
+              <a:buNone/>
+              <a:defRPr sz="1000"/>
+            </a:lvl9pPr>
+          </a:lstStyle>
+          <a:p>
+            <a:pPr lvl="0"/>
+            <a:r>
+              <a:rPr lang="en-US"/>
+              <a:t>Click to edit Master text styles</a:t>
+            </a:r>
+          </a:p>
+        </p:txBody>
+      </p:sp>
+      <p:sp>
+        <p:nvSpPr>
+          <p:cNvPr id="5" name="Date Placeholder 4"/>
+          <p:cNvSpPr>
+            <a:spLocks noGrp="1"/>
+          </p:cNvSpPr>
+          <p:nvPr>
+            <p:ph type="dt" sz="half" idx="10"/>
+          </p:nvPr>
+        </p:nvSpPr>
+        <p:spPr/>
+        <p:txBody>
+          <a:bodyPr/>
+          <a:lstStyle/>
+          <a:p>
+            <a:fld id="{DAB5A13C-17B4-48A4-AF5F-EEE8ED69FC02}" type="datetimeFigureOut">
+              <a:rPr lang="en-US" smtClean="0"/>
+              <a:t>7/14/2026</a:t>
+            </a:fld>
+            <a:endParaRPr lang="en-US"/>
+          </a:p>
+        </p:txBody>
+      </p:sp>
+      <p:sp>
+        <p:nvSpPr>
+          <p:cNvPr id="6" name="Footer Placeholder 5"/>
+          <p:cNvSpPr>
+            <a:spLocks noGrp="1"/>
+          </p:cNvSpPr>
+          <p:nvPr>
+            <p:ph type="ftr" sz="quarter" idx="11"/>
+          </p:nvPr>
+        </p:nvSpPr>
+        <p:spPr/>
+        <p:txBody>
+          <a:bodyPr/>
+          <a:lstStyle/>
+          <a:p>
+            <a:endParaRPr lang="en-US"/>
+          </a:p>
+        </p:txBody>
+      </p:sp>
+      <p:sp>
+        <p:nvSpPr>
+          <p:cNvPr id="7" name="Slide Number Placeholder 6"/>
+          <p:cNvSpPr>
+            <a:spLocks noGrp="1"/>
+          </p:cNvSpPr>
+          <p:nvPr>
+            <p:ph type="sldNum" sz="quarter" idx="12"/>
+          </p:nvPr>
+        </p:nvSpPr>
+        <p:spPr/>
+        <p:txBody>
+          <a:bodyPr/>
+          <a:lstStyle/>
+          <a:p>
+            <a:fld id="{9DDC1F40-31FB-4487-81C0-94B40DAEFA1D}" type="slidenum">
+              <a:rPr lang="en-US" smtClean="0"/>
+              <a:t>‹#›</a:t>
+            </a:fld>
+            <a:endParaRPr lang="en-US"/>
+          </a:p>
+        </p:txBody>
+      </p:sp>
+    </p:spTree>
+    <p:extLst>
+      <p:ext uri="{BB962C8B-B14F-4D97-AF65-F5344CB8AC3E}">
+        <p14:creationId xmlns:p14="http://schemas.microsoft.com/office/powerpoint/2010/main" val="546974291"/>
+      </p:ext>
+    </p:extLst>
+  </p:cSld>
+  <p:clrMapOvr>
+    <a:masterClrMapping/>
+  </p:clrMapOvr>
+  <p:hf sldNum="0" hdr="0" ftr="0" dt="0"/>
+</p:sldLayout>
+</file>
+
+<file path=ppt/slideLayouts/slideLayout9.xml><?xml version="1.0" encoding="utf-8"?>
+<p:sldLayout xmlns:a="http://schemas.openxmlformats.org/drawingml/2006/main" xmlns:r="http://schemas.openxmlformats.org/officeDocument/2006/relationships" xmlns:p="http://schemas.openxmlformats.org/presentationml/2006/main" type="picTx" preserve="1">
+  <p:cSld name="Picture with Caption">
+    <p:spTree>
+      <p:nvGrpSpPr>
+        <p:cNvPr id="1" name=""/>
+        <p:cNvGrpSpPr/>
+        <p:nvPr/>
+      </p:nvGrpSpPr>
+      <p:grpSpPr>
+        <a:xfrm>
+          <a:off x="0" y="0"/>
+          <a:ext cx="0" cy="0"/>
+          <a:chOff x="0" y="0"/>
+          <a:chExt cx="0" cy="0"/>
+        </a:xfrm>
+      </p:grpSpPr>
+      <p:sp>
+        <p:nvSpPr>
+          <p:cNvPr id="2" name="Title 1"/>
+          <p:cNvSpPr>
+            <a:spLocks noGrp="1"/>
+          </p:cNvSpPr>
+          <p:nvPr>
+            <p:ph type="title"/>
+          </p:nvPr>
+        </p:nvSpPr>
+        <p:spPr>
+          <a:xfrm>
+            <a:off x="839788" y="457200"/>
+            <a:ext cx="3932237" cy="1600200"/>
+          </a:xfrm>
+        </p:spPr>
+        <p:txBody>
+          <a:bodyPr anchor="b"/>
+          <a:lstStyle>
+            <a:lvl1pPr>
+              <a:defRPr sz="3200"/>
+            </a:lvl1pPr>
+          </a:lstStyle>
+          <a:p>
+            <a:r>
+              <a:rPr lang="en-US"/>
+              <a:t>Click to edit Master title style</a:t>
+            </a:r>
+            <a:endParaRPr lang="en-US" dirty="0"/>
+          </a:p>
+        </p:txBody>
+      </p:sp>
+      <p:sp>
+        <p:nvSpPr>
+          <p:cNvPr id="3" name="Picture Placeholder 2"/>
+          <p:cNvSpPr>
+            <a:spLocks noGrp="1" noChangeAspect="1"/>
+          </p:cNvSpPr>
+          <p:nvPr>
+            <p:ph type="pic" idx="1"/>
+          </p:nvPr>
+        </p:nvSpPr>
+        <p:spPr>
+          <a:xfrm>
+            <a:off x="5183188" y="987425"/>
+            <a:ext cx="6172200" cy="4873625"/>
+          </a:xfrm>
+        </p:spPr>
+        <p:txBody>
+          <a:bodyPr anchor="t"/>
+          <a:lstStyle>
+            <a:lvl1pPr marL="0" indent="0">
+              <a:buNone/>
+              <a:defRPr sz="3200"/>
+            </a:lvl1pPr>
+            <a:lvl2pPr marL="457200" indent="0">
+              <a:buNone/>
+              <a:defRPr sz="2800"/>
+            </a:lvl2pPr>
+            <a:lvl3pPr marL="914400" indent="0">
+              <a:buNone/>
+              <a:defRPr sz="2400"/>
+            </a:lvl3pPr>
+            <a:lvl4pPr marL="1371600" indent="0">
+              <a:buNone/>
+              <a:defRPr sz="2000"/>
+            </a:lvl4pPr>
+            <a:lvl5pPr marL="1828800" indent="0">
+              <a:buNone/>
+              <a:defRPr sz="2000"/>
+            </a:lvl5pPr>
+            <a:lvl6pPr marL="2286000" indent="0">
+              <a:buNone/>
+              <a:defRPr sz="2000"/>
+            </a:lvl6pPr>
+            <a:lvl7pPr marL="2743200" indent="0">
+              <a:buNone/>
+              <a:defRPr sz="2000"/>
+            </a:lvl7pPr>
+            <a:lvl8pPr marL="3200400" indent="0">
+              <a:buNone/>
+              <a:defRPr sz="2000"/>
+            </a:lvl8pPr>
+            <a:lvl9pPr marL="3657600" indent="0">
+              <a:buNone/>
+              <a:defRPr sz="2000"/>
+            </a:lvl9pPr>
+          </a:lstStyle>
+          <a:p>
+            <a:r>
+              <a:rPr lang="en-US"/>
+              <a:t>Click icon to add picture</a:t>
+            </a:r>
+            <a:endParaRPr lang="en-US" dirty="0"/>
+          </a:p>
+        </p:txBody>
+      </p:sp>
+      <p:sp>
+        <p:nvSpPr>
+          <p:cNvPr id="4" name="Text Placeholder 3"/>
+          <p:cNvSpPr>
+            <a:spLocks noGrp="1"/>
+          </p:cNvSpPr>
+          <p:nvPr>
+            <p:ph type="body" sz="half" idx="2"/>
+          </p:nvPr>
+        </p:nvSpPr>
+        <p:spPr>
+          <a:xfrm>
+            <a:off x="839788" y="2057400"/>
+            <a:ext cx="3932237" cy="3811588"/>
+          </a:xfrm>
+        </p:spPr>
+        <p:txBody>
+          <a:bodyPr/>
+          <a:lstStyle>
+            <a:lvl1pPr marL="0" indent="0">
+              <a:buNone/>
+              <a:defRPr sz="1600"/>
+            </a:lvl1pPr>
+            <a:lvl2pPr marL="457200" indent="0">
+              <a:buNone/>
+              <a:defRPr sz="1400"/>
+            </a:lvl2pPr>
+            <a:lvl3pPr marL="914400" indent="0">
+              <a:buNone/>
+              <a:defRPr sz="1200"/>
+            </a:lvl3pPr>
+            <a:lvl4pPr marL="1371600" indent="0">
+              <a:buNone/>
+              <a:defRPr sz="1000"/>
+            </a:lvl4pPr>
+            <a:lvl5pPr marL="1828800" indent="0">
+              <a:buNone/>
+              <a:defRPr sz="1000"/>
+            </a:lvl5pPr>
+            <a:lvl6pPr marL="2286000" indent="0">
+              <a:buNone/>
+              <a:defRPr sz="1000"/>
+            </a:lvl6pPr>
+            <a:lvl7pPr marL="2743200" indent="0">
+              <a:buNone/>
+              <a:defRPr sz="1000"/>
+            </a:lvl7pPr>
+            <a:lvl8pPr marL="3200400" indent="0">
+              <a:buNone/>
+              <a:defRPr sz="1000"/>
+            </a:lvl8pPr>
+            <a:lvl9pPr marL="3657600" indent="0">
+              <a:buNone/>
+              <a:defRPr sz="1000"/>
+            </a:lvl9pPr>
+          </a:lstStyle>
+          <a:p>
+            <a:pPr lvl="0"/>
+            <a:r>
+              <a:rPr lang="en-US"/>
+              <a:t>Click to edit Master text styles</a:t>
+            </a:r>
+          </a:p>
+        </p:txBody>
+      </p:sp>
+      <p:sp>
+        <p:nvSpPr>
+          <p:cNvPr id="5" name="Date Placeholder 4"/>
+          <p:cNvSpPr>
+            <a:spLocks noGrp="1"/>
+          </p:cNvSpPr>
+          <p:nvPr>
+            <p:ph type="dt" sz="half" idx="10"/>
+          </p:nvPr>
+        </p:nvSpPr>
+        <p:spPr/>
+        <p:txBody>
+          <a:bodyPr/>
+          <a:lstStyle/>
+          <a:p>
+            <a:fld id="{DAB5A13C-17B4-48A4-AF5F-EEE8ED69FC02}" type="datetimeFigureOut">
+              <a:rPr lang="en-US" smtClean="0"/>
+              <a:t>7/14/2026</a:t>
+            </a:fld>
+            <a:endParaRPr lang="en-US"/>
+          </a:p>
+        </p:txBody>
+      </p:sp>
+      <p:sp>
+        <p:nvSpPr>
+          <p:cNvPr id="6" name="Footer Placeholder 5"/>
+          <p:cNvSpPr>
+            <a:spLocks noGrp="1"/>
+          </p:cNvSpPr>
+          <p:nvPr>
+            <p:ph type="ftr" sz="quarter" idx="11"/>
+          </p:nvPr>
+        </p:nvSpPr>
+        <p:spPr/>
+        <p:txBody>
+          <a:bodyPr/>
+          <a:lstStyle/>
+          <a:p>
+            <a:endParaRPr lang="en-US"/>
+          </a:p>
+        </p:txBody>
+      </p:sp>
+      <p:sp>
+        <p:nvSpPr>
+          <p:cNvPr id="7" name="Slide Number Placeholder 6"/>
+          <p:cNvSpPr>
+            <a:spLocks noGrp="1"/>
+          </p:cNvSpPr>
+          <p:nvPr>
+            <p:ph type="sldNum" sz="quarter" idx="12"/>
+          </p:nvPr>
+        </p:nvSpPr>
+        <p:spPr/>
+        <p:txBody>
+          <a:bodyPr/>
+          <a:lstStyle/>
+          <a:p>
+            <a:fld id="{9DDC1F40-31FB-4487-81C0-94B40DAEFA1D}" type="slidenum">
+              <a:rPr lang="en-US" smtClean="0"/>
+              <a:t>‹#›</a:t>
+            </a:fld>
+            <a:endParaRPr lang="en-US"/>
+          </a:p>
+        </p:txBody>
+      </p:sp>
+    </p:spTree>
+    <p:extLst>
+      <p:ext uri="{BB962C8B-B14F-4D97-AF65-F5344CB8AC3E}">
+        <p14:creationId xmlns:p14="http://schemas.microsoft.com/office/powerpoint/2010/main" val="1995563124"/>
+      </p:ext>
+    </p:extLst>
+  </p:cSld>
+  <p:clrMapOvr>
+    <a:masterClrMapping/>
+  </p:clrMapOvr>
+  <p:hf sldNum="0" hdr="0" ftr="0" dt="0"/>
 </p:sldLayout>
 </file>
 
@@ -31443,16 +33766,249 @@
           <a:chExt cx="0" cy="0"/>
         </a:xfrm>
       </p:grpSpPr>
+      <p:sp>
+        <p:nvSpPr>
+          <p:cNvPr id="2" name="Title Placeholder 1"/>
+          <p:cNvSpPr>
+            <a:spLocks noGrp="1"/>
+          </p:cNvSpPr>
+          <p:nvPr>
+            <p:ph type="title"/>
+          </p:nvPr>
+        </p:nvSpPr>
+        <p:spPr>
+          <a:xfrm>
+            <a:off x="838200" y="365125"/>
+            <a:ext cx="10515600" cy="1325563"/>
+          </a:xfrm>
+          <a:prstGeom prst="rect">
+            <a:avLst/>
+          </a:prstGeom>
+        </p:spPr>
+        <p:txBody>
+          <a:bodyPr vert="horz" lIns="91440" tIns="45720" rIns="91440" bIns="45720" rtlCol="0" anchor="ctr">
+            <a:normAutofit/>
+          </a:bodyPr>
+          <a:lstStyle/>
+          <a:p>
+            <a:r>
+              <a:rPr lang="en-US"/>
+              <a:t>Click to edit Master title style</a:t>
+            </a:r>
+            <a:endParaRPr lang="en-US" dirty="0"/>
+          </a:p>
+        </p:txBody>
+      </p:sp>
+      <p:sp>
+        <p:nvSpPr>
+          <p:cNvPr id="3" name="Text Placeholder 2"/>
+          <p:cNvSpPr>
+            <a:spLocks noGrp="1"/>
+          </p:cNvSpPr>
+          <p:nvPr>
+            <p:ph type="body" idx="1"/>
+          </p:nvPr>
+        </p:nvSpPr>
+        <p:spPr>
+          <a:xfrm>
+            <a:off x="838200" y="1825625"/>
+            <a:ext cx="10515600" cy="4351338"/>
+          </a:xfrm>
+          <a:prstGeom prst="rect">
+            <a:avLst/>
+          </a:prstGeom>
+        </p:spPr>
+        <p:txBody>
+          <a:bodyPr vert="horz" lIns="91440" tIns="45720" rIns="91440" bIns="45720" rtlCol="0">
+            <a:normAutofit/>
+          </a:bodyPr>
+          <a:lstStyle/>
+          <a:p>
+            <a:pPr lvl="0"/>
+            <a:r>
+              <a:rPr lang="en-US"/>
+              <a:t>Click to edit Master text styles</a:t>
+            </a:r>
+          </a:p>
+          <a:p>
+            <a:pPr lvl="1"/>
+            <a:r>
+              <a:rPr lang="en-US"/>
+              <a:t>Second level</a:t>
+            </a:r>
+          </a:p>
+          <a:p>
+            <a:pPr lvl="2"/>
+            <a:r>
+              <a:rPr lang="en-US"/>
+              <a:t>Third level</a:t>
+            </a:r>
+          </a:p>
+          <a:p>
+            <a:pPr lvl="3"/>
+            <a:r>
+              <a:rPr lang="en-US"/>
+              <a:t>Fourth level</a:t>
+            </a:r>
+          </a:p>
+          <a:p>
+            <a:pPr lvl="4"/>
+            <a:r>
+              <a:rPr lang="en-US"/>
+              <a:t>Fifth level</a:t>
+            </a:r>
+            <a:endParaRPr lang="en-US" dirty="0"/>
+          </a:p>
+        </p:txBody>
+      </p:sp>
+      <p:sp>
+        <p:nvSpPr>
+          <p:cNvPr id="4" name="Date Placeholder 3"/>
+          <p:cNvSpPr>
+            <a:spLocks noGrp="1"/>
+          </p:cNvSpPr>
+          <p:nvPr>
+            <p:ph type="dt" sz="half" idx="2"/>
+          </p:nvPr>
+        </p:nvSpPr>
+        <p:spPr>
+          <a:xfrm>
+            <a:off x="838200" y="6356350"/>
+            <a:ext cx="2743200" cy="365125"/>
+          </a:xfrm>
+          <a:prstGeom prst="rect">
+            <a:avLst/>
+          </a:prstGeom>
+        </p:spPr>
+        <p:txBody>
+          <a:bodyPr vert="horz" lIns="91440" tIns="45720" rIns="91440" bIns="45720" rtlCol="0" anchor="ctr"/>
+          <a:lstStyle>
+            <a:lvl1pPr algn="l">
+              <a:defRPr sz="1200">
+                <a:solidFill>
+                  <a:schemeClr val="tx1">
+                    <a:tint val="82000"/>
+                  </a:schemeClr>
+                </a:solidFill>
+              </a:defRPr>
+            </a:lvl1pPr>
+          </a:lstStyle>
+          <a:p>
+            <a:fld id="{DAB5A13C-17B4-48A4-AF5F-EEE8ED69FC02}" type="datetimeFigureOut">
+              <a:rPr lang="en-US" smtClean="0"/>
+              <a:t>7/14/2026</a:t>
+            </a:fld>
+            <a:endParaRPr lang="en-US"/>
+          </a:p>
+        </p:txBody>
+      </p:sp>
+      <p:sp>
+        <p:nvSpPr>
+          <p:cNvPr id="5" name="Footer Placeholder 4"/>
+          <p:cNvSpPr>
+            <a:spLocks noGrp="1"/>
+          </p:cNvSpPr>
+          <p:nvPr>
+            <p:ph type="ftr" sz="quarter" idx="3"/>
+          </p:nvPr>
+        </p:nvSpPr>
+        <p:spPr>
+          <a:xfrm>
+            <a:off x="4038600" y="6356350"/>
+            <a:ext cx="4114800" cy="365125"/>
+          </a:xfrm>
+          <a:prstGeom prst="rect">
+            <a:avLst/>
+          </a:prstGeom>
+        </p:spPr>
+        <p:txBody>
+          <a:bodyPr vert="horz" lIns="91440" tIns="45720" rIns="91440" bIns="45720" rtlCol="0" anchor="ctr"/>
+          <a:lstStyle>
+            <a:lvl1pPr algn="ctr">
+              <a:defRPr sz="1200">
+                <a:solidFill>
+                  <a:schemeClr val="tx1">
+                    <a:tint val="82000"/>
+                  </a:schemeClr>
+                </a:solidFill>
+              </a:defRPr>
+            </a:lvl1pPr>
+          </a:lstStyle>
+          <a:p>
+            <a:endParaRPr lang="en-US"/>
+          </a:p>
+        </p:txBody>
+      </p:sp>
+      <p:sp>
+        <p:nvSpPr>
+          <p:cNvPr id="6" name="Slide Number Placeholder 5"/>
+          <p:cNvSpPr>
+            <a:spLocks noGrp="1"/>
+          </p:cNvSpPr>
+          <p:nvPr>
+            <p:ph type="sldNum" sz="quarter" idx="4"/>
+          </p:nvPr>
+        </p:nvSpPr>
+        <p:spPr>
+          <a:xfrm>
+            <a:off x="8610600" y="6356350"/>
+            <a:ext cx="2743200" cy="365125"/>
+          </a:xfrm>
+          <a:prstGeom prst="rect">
+            <a:avLst/>
+          </a:prstGeom>
+        </p:spPr>
+        <p:txBody>
+          <a:bodyPr vert="horz" lIns="91440" tIns="45720" rIns="91440" bIns="45720" rtlCol="0" anchor="ctr"/>
+          <a:lstStyle>
+            <a:lvl1pPr algn="r">
+              <a:defRPr sz="1200">
+                <a:solidFill>
+                  <a:schemeClr val="tx1">
+                    <a:tint val="82000"/>
+                  </a:schemeClr>
+                </a:solidFill>
+              </a:defRPr>
+            </a:lvl1pPr>
+          </a:lstStyle>
+          <a:p>
+            <a:fld id="{9DDC1F40-31FB-4487-81C0-94B40DAEFA1D}" type="slidenum">
+              <a:rPr lang="en-US" smtClean="0"/>
+              <a:t>‹#›</a:t>
+            </a:fld>
+            <a:endParaRPr lang="en-US"/>
+          </a:p>
+        </p:txBody>
+      </p:sp>
     </p:spTree>
+    <p:extLst>
+      <p:ext uri="{BB962C8B-B14F-4D97-AF65-F5344CB8AC3E}">
+        <p14:creationId xmlns:p14="http://schemas.microsoft.com/office/powerpoint/2010/main" val="4185886291"/>
+      </p:ext>
+    </p:extLst>
   </p:cSld>
   <p:clrMap bg1="lt1" tx1="dk1" bg2="lt2" tx2="dk2" accent1="accent1" accent2="accent2" accent3="accent3" accent4="accent4" accent5="accent5" accent6="accent6" hlink="hlink" folHlink="folHlink"/>
   <p:sldLayoutIdLst>
-    <p:sldLayoutId id="2147483649" r:id="rId1"/>
+    <p:sldLayoutId id="2147483677" r:id="rId1"/>
+    <p:sldLayoutId id="2147483678" r:id="rId2"/>
+    <p:sldLayoutId id="2147483679" r:id="rId3"/>
+    <p:sldLayoutId id="2147483680" r:id="rId4"/>
+    <p:sldLayoutId id="2147483681" r:id="rId5"/>
+    <p:sldLayoutId id="2147483682" r:id="rId6"/>
+    <p:sldLayoutId id="2147483683" r:id="rId7"/>
+    <p:sldLayoutId id="2147483684" r:id="rId8"/>
+    <p:sldLayoutId id="2147483685" r:id="rId9"/>
+    <p:sldLayoutId id="2147483686" r:id="rId10"/>
+    <p:sldLayoutId id="2147483687" r:id="rId11"/>
+    <p:sldLayoutId id="2147483688" r:id="rId12"/>
   </p:sldLayoutIdLst>
   <p:hf sldNum="0" hdr="0" ftr="0" dt="0"/>
   <p:txStyles>
     <p:titleStyle>
-      <a:lvl1pPr algn="ctr" defTabSz="914400" rtl="0" eaLnBrk="1" latinLnBrk="0" hangingPunct="1">
+      <a:lvl1pPr algn="l" defTabSz="914400" rtl="0" eaLnBrk="1" latinLnBrk="0" hangingPunct="1">
+        <a:lnSpc>
+          <a:spcPct val="90000"/>
+        </a:lnSpc>
         <a:spcBef>
           <a:spcPct val="0"/>
         </a:spcBef>
@@ -31468,13 +34024,16 @@
       </a:lvl1pPr>
     </p:titleStyle>
     <p:bodyStyle>
-      <a:lvl1pPr marL="342900" indent="-342900" algn="l" defTabSz="914400" rtl="0" eaLnBrk="1" latinLnBrk="0" hangingPunct="1">
+      <a:lvl1pPr marL="228600" indent="-228600" algn="l" defTabSz="914400" rtl="0" eaLnBrk="1" latinLnBrk="0" hangingPunct="1">
+        <a:lnSpc>
+          <a:spcPct val="90000"/>
+        </a:lnSpc>
         <a:spcBef>
-          <a:spcPct val="20000"/>
+          <a:spcPts val="1000"/>
         </a:spcBef>
-        <a:buFont typeface="Arial" pitchFamily="34" charset="0"/>
+        <a:buFont typeface="Arial" panose="020B0604020202020204" pitchFamily="34" charset="0"/>
         <a:buChar char="•"/>
-        <a:defRPr sz="3200" kern="1200">
+        <a:defRPr sz="2800" kern="1200">
           <a:solidFill>
             <a:schemeClr val="tx1"/>
           </a:solidFill>
@@ -31483,13 +34042,16 @@
           <a:cs typeface="+mn-cs"/>
         </a:defRPr>
       </a:lvl1pPr>
-      <a:lvl2pPr marL="742950" indent="-285750" algn="l" defTabSz="914400" rtl="0" eaLnBrk="1" latinLnBrk="0" hangingPunct="1">
+      <a:lvl2pPr marL="685800" indent="-228600" algn="l" defTabSz="914400" rtl="0" eaLnBrk="1" latinLnBrk="0" hangingPunct="1">
+        <a:lnSpc>
+          <a:spcPct val="90000"/>
+        </a:lnSpc>
         <a:spcBef>
-          <a:spcPct val="20000"/>
+          <a:spcPts val="500"/>
         </a:spcBef>
-        <a:buFont typeface="Arial" pitchFamily="34" charset="0"/>
-        <a:buChar char="–"/>
-        <a:defRPr sz="2800" kern="1200">
+        <a:buFont typeface="Arial" panose="020B0604020202020204" pitchFamily="34" charset="0"/>
+        <a:buChar char="•"/>
+        <a:defRPr sz="2400" kern="1200">
           <a:solidFill>
             <a:schemeClr val="tx1"/>
           </a:solidFill>
@@ -31499,12 +34061,15 @@
         </a:defRPr>
       </a:lvl2pPr>
       <a:lvl3pPr marL="1143000" indent="-228600" algn="l" defTabSz="914400" rtl="0" eaLnBrk="1" latinLnBrk="0" hangingPunct="1">
+        <a:lnSpc>
+          <a:spcPct val="90000"/>
+        </a:lnSpc>
         <a:spcBef>
-          <a:spcPct val="20000"/>
+          <a:spcPts val="500"/>
         </a:spcBef>
-        <a:buFont typeface="Arial" pitchFamily="34" charset="0"/>
+        <a:buFont typeface="Arial" panose="020B0604020202020204" pitchFamily="34" charset="0"/>
         <a:buChar char="•"/>
-        <a:defRPr sz="2400" kern="1200">
+        <a:defRPr sz="2000" kern="1200">
           <a:solidFill>
             <a:schemeClr val="tx1"/>
           </a:solidFill>
@@ -31514,12 +34079,15 @@
         </a:defRPr>
       </a:lvl3pPr>
       <a:lvl4pPr marL="1600200" indent="-228600" algn="l" defTabSz="914400" rtl="0" eaLnBrk="1" latinLnBrk="0" hangingPunct="1">
+        <a:lnSpc>
+          <a:spcPct val="90000"/>
+        </a:lnSpc>
         <a:spcBef>
-          <a:spcPct val="20000"/>
+          <a:spcPts val="500"/>
         </a:spcBef>
-        <a:buFont typeface="Arial" pitchFamily="34" charset="0"/>
-        <a:buChar char="–"/>
-        <a:defRPr sz="2000" kern="1200">
+        <a:buFont typeface="Arial" panose="020B0604020202020204" pitchFamily="34" charset="0"/>
+        <a:buChar char="•"/>
+        <a:defRPr sz="1800" kern="1200">
           <a:solidFill>
             <a:schemeClr val="tx1"/>
           </a:solidFill>
@@ -31529,12 +34097,15 @@
         </a:defRPr>
       </a:lvl4pPr>
       <a:lvl5pPr marL="2057400" indent="-228600" algn="l" defTabSz="914400" rtl="0" eaLnBrk="1" latinLnBrk="0" hangingPunct="1">
+        <a:lnSpc>
+          <a:spcPct val="90000"/>
+        </a:lnSpc>
         <a:spcBef>
-          <a:spcPct val="20000"/>
+          <a:spcPts val="500"/>
         </a:spcBef>
-        <a:buFont typeface="Arial" pitchFamily="34" charset="0"/>
-        <a:buChar char="»"/>
-        <a:defRPr sz="2000" kern="1200">
+        <a:buFont typeface="Arial" panose="020B0604020202020204" pitchFamily="34" charset="0"/>
+        <a:buChar char="•"/>
+        <a:defRPr sz="1800" kern="1200">
           <a:solidFill>
             <a:schemeClr val="tx1"/>
           </a:solidFill>
@@ -31544,12 +34115,15 @@
         </a:defRPr>
       </a:lvl5pPr>
       <a:lvl6pPr marL="2514600" indent="-228600" algn="l" defTabSz="914400" rtl="0" eaLnBrk="1" latinLnBrk="0" hangingPunct="1">
+        <a:lnSpc>
+          <a:spcPct val="90000"/>
+        </a:lnSpc>
         <a:spcBef>
-          <a:spcPct val="20000"/>
+          <a:spcPts val="500"/>
         </a:spcBef>
-        <a:buFont typeface="Arial" pitchFamily="34" charset="0"/>
+        <a:buFont typeface="Arial" panose="020B0604020202020204" pitchFamily="34" charset="0"/>
         <a:buChar char="•"/>
-        <a:defRPr sz="2000" kern="1200">
+        <a:defRPr sz="1800" kern="1200">
           <a:solidFill>
             <a:schemeClr val="tx1"/>
           </a:solidFill>
@@ -31559,12 +34133,15 @@
         </a:defRPr>
       </a:lvl6pPr>
       <a:lvl7pPr marL="2971800" indent="-228600" algn="l" defTabSz="914400" rtl="0" eaLnBrk="1" latinLnBrk="0" hangingPunct="1">
+        <a:lnSpc>
+          <a:spcPct val="90000"/>
+        </a:lnSpc>
         <a:spcBef>
-          <a:spcPct val="20000"/>
+          <a:spcPts val="500"/>
         </a:spcBef>
-        <a:buFont typeface="Arial" pitchFamily="34" charset="0"/>
+        <a:buFont typeface="Arial" panose="020B0604020202020204" pitchFamily="34" charset="0"/>
         <a:buChar char="•"/>
-        <a:defRPr sz="2000" kern="1200">
+        <a:defRPr sz="1800" kern="1200">
           <a:solidFill>
             <a:schemeClr val="tx1"/>
           </a:solidFill>
@@ -31574,12 +34151,15 @@
         </a:defRPr>
       </a:lvl7pPr>
       <a:lvl8pPr marL="3429000" indent="-228600" algn="l" defTabSz="914400" rtl="0" eaLnBrk="1" latinLnBrk="0" hangingPunct="1">
+        <a:lnSpc>
+          <a:spcPct val="90000"/>
+        </a:lnSpc>
         <a:spcBef>
-          <a:spcPct val="20000"/>
+          <a:spcPts val="500"/>
         </a:spcBef>
-        <a:buFont typeface="Arial" pitchFamily="34" charset="0"/>
+        <a:buFont typeface="Arial" panose="020B0604020202020204" pitchFamily="34" charset="0"/>
         <a:buChar char="•"/>
-        <a:defRPr sz="2000" kern="1200">
+        <a:defRPr sz="1800" kern="1200">
           <a:solidFill>
             <a:schemeClr val="tx1"/>
           </a:solidFill>
@@ -31589,12 +34169,15 @@
         </a:defRPr>
       </a:lvl8pPr>
       <a:lvl9pPr marL="3886200" indent="-228600" algn="l" defTabSz="914400" rtl="0" eaLnBrk="1" latinLnBrk="0" hangingPunct="1">
+        <a:lnSpc>
+          <a:spcPct val="90000"/>
+        </a:lnSpc>
         <a:spcBef>
-          <a:spcPct val="20000"/>
+          <a:spcPts val="500"/>
         </a:spcBef>
-        <a:buFont typeface="Arial" pitchFamily="34" charset="0"/>
+        <a:buFont typeface="Arial" panose="020B0604020202020204" pitchFamily="34" charset="0"/>
         <a:buChar char="•"/>
-        <a:defRPr sz="2000" kern="1200">
+        <a:defRPr sz="1800" kern="1200">
           <a:solidFill>
             <a:schemeClr val="tx1"/>
           </a:solidFill>
@@ -41749,7 +44332,7 @@
 <file path=ppt/theme/theme1.xml><?xml version="1.0" encoding="utf-8"?>
 <a:theme xmlns:a="http://schemas.openxmlformats.org/drawingml/2006/main" name="Office Theme">
   <a:themeElements>
-    <a:clrScheme name="Office">
+    <a:clrScheme name="Office Theme">
       <a:dk1>
         <a:sysClr val="windowText" lastClr="000000"/>
       </a:dk1>
@@ -41757,39 +44340,39 @@
         <a:sysClr val="window" lastClr="FFFFFF"/>
       </a:lt1>
       <a:dk2>
-        <a:srgbClr val="44546A"/>
+        <a:srgbClr val="0E2841"/>
       </a:dk2>
       <a:lt2>
-        <a:srgbClr val="E7E6E6"/>
+        <a:srgbClr val="E8E8E8"/>
       </a:lt2>
       <a:accent1>
-        <a:srgbClr val="4472C4"/>
+        <a:srgbClr val="156082"/>
       </a:accent1>
       <a:accent2>
-        <a:srgbClr val="ED7D31"/>
+        <a:srgbClr val="E97132"/>
       </a:accent2>
       <a:accent3>
-        <a:srgbClr val="A5A5A5"/>
+        <a:srgbClr val="196B24"/>
       </a:accent3>
       <a:accent4>
-        <a:srgbClr val="FFC000"/>
+        <a:srgbClr val="0F9ED5"/>
       </a:accent4>
       <a:accent5>
-        <a:srgbClr val="5B9BD5"/>
+        <a:srgbClr val="A02B93"/>
       </a:accent5>
       <a:accent6>
-        <a:srgbClr val="70AD47"/>
+        <a:srgbClr val="4EA72E"/>
       </a:accent6>
       <a:hlink>
-        <a:srgbClr val="0563C1"/>
+        <a:srgbClr val="467886"/>
       </a:hlink>
       <a:folHlink>
-        <a:srgbClr val="954F72"/>
+        <a:srgbClr val="96607D"/>
       </a:folHlink>
     </a:clrScheme>
-    <a:fontScheme name="Office">
+    <a:fontScheme name="Office Theme">
       <a:majorFont>
-        <a:latin typeface="Calibri Light" panose="020F0302020204030204"/>
+        <a:latin typeface="Aptos Display" panose="02110004020202020204"/>
         <a:ea typeface=""/>
         <a:cs typeface=""/>
         <a:font script="Jpan" typeface="游ゴシック Light"/>
@@ -41841,7 +44424,7 @@
         <a:font script="Tfng" typeface="Ebrima"/>
       </a:majorFont>
       <a:minorFont>
-        <a:latin typeface="Calibri" panose="020F0502020204030204"/>
+        <a:latin typeface="Aptos" panose="02110004020202020204"/>
         <a:ea typeface=""/>
         <a:cs typeface=""/>
         <a:font script="Jpan" typeface="游ゴシック"/>
@@ -41893,7 +44476,7 @@
         <a:font script="Tfng" typeface="Ebrima"/>
       </a:minorFont>
     </a:fontScheme>
-    <a:fmtScheme name="Office">
+    <a:fmtScheme name="Office Theme">
       <a:fillStyleLst>
         <a:solidFill>
           <a:schemeClr val="phClr"/>
@@ -41952,13 +44535,6 @@
         </a:gradFill>
       </a:fillStyleLst>
       <a:lnStyleLst>
-        <a:ln w="6350" cap="flat" cmpd="sng" algn="ctr">
-          <a:solidFill>
-            <a:schemeClr val="phClr"/>
-          </a:solidFill>
-          <a:prstDash val="solid"/>
-          <a:miter lim="800000"/>
-        </a:ln>
         <a:ln w="12700" cap="flat" cmpd="sng" algn="ctr">
           <a:solidFill>
             <a:schemeClr val="phClr"/>
@@ -41967,6 +44543,13 @@
           <a:miter lim="800000"/>
         </a:ln>
         <a:ln w="19050" cap="flat" cmpd="sng" algn="ctr">
+          <a:solidFill>
+            <a:schemeClr val="phClr"/>
+          </a:solidFill>
+          <a:prstDash val="solid"/>
+          <a:miter lim="800000"/>
+        </a:ln>
+        <a:ln w="25400" cap="flat" cmpd="sng" algn="ctr">
           <a:solidFill>
             <a:schemeClr val="phClr"/>
           </a:solidFill>
@@ -42031,11 +44614,31 @@
       </a:bgFillStyleLst>
     </a:fmtScheme>
   </a:themeElements>
-  <a:objectDefaults/>
+  <a:objectDefaults>
+    <a:lnDef>
+      <a:spPr/>
+      <a:bodyPr/>
+      <a:lstStyle/>
+      <a:style>
+        <a:lnRef idx="2">
+          <a:schemeClr val="accent1"/>
+        </a:lnRef>
+        <a:fillRef idx="0">
+          <a:schemeClr val="accent1"/>
+        </a:fillRef>
+        <a:effectRef idx="1">
+          <a:schemeClr val="accent1"/>
+        </a:effectRef>
+        <a:fontRef idx="minor">
+          <a:schemeClr val="tx1"/>
+        </a:fontRef>
+      </a:style>
+    </a:lnDef>
+  </a:objectDefaults>
   <a:extraClrSchemeLst/>
   <a:extLst>
     <a:ext uri="{05A4C25C-085E-4340-85A3-A5531E510DB2}">
-      <thm15:themeFamily xmlns:thm15="http://schemas.microsoft.com/office/thememl/2012/main" name="Office Theme" id="{62F939B6-93AF-4DB8-9C6B-D6C7DFDC589F}" vid="{4A3C46E8-61CC-4603-A589-7422A47A8E4A}"/>
+      <thm15:themeFamily xmlns:thm15="http://schemas.microsoft.com/office/thememl/2012/main" name="Office Theme" id="{2E142A2C-CD16-42D6-873A-C26D2A0506FA}" vid="{1BDDFF52-6CD6-40A5-AB3C-68EB2F1E4D0A}"/>
     </a:ext>
   </a:extLst>
 </a:theme>
